--- a/Wisdom_Social_Presentation.pptx
+++ b/Wisdom_Social_Presentation.pptx
@@ -5169,8 +5169,8 @@
         </p:nvSpPr>
         <p:spPr>
           <a:xfrm>
-            <a:off x="1005840" y="2697480"/>
-            <a:ext cx="4800600" cy="3200400"/>
+            <a:off x="1005840" y="2788920"/>
+            <a:ext cx="4800600" cy="3108960"/>
           </a:xfrm>
           <a:prstGeom prst="rect">
             <a:avLst/>
@@ -5188,11 +5188,11 @@
                 <a:spcPct val="105000"/>
               </a:lnSpc>
               <a:spcAft>
-                <a:spcPts val="1100"/>
+                <a:spcPts val="1400"/>
               </a:spcAft>
             </a:pPr>
             <a:r>
-              <a:rPr sz="1400" b="1">
+              <a:rPr sz="1500" b="1">
                 <a:solidFill>
                   <a:srgbClr val="2E93AE"/>
                 </a:solidFill>
@@ -5201,13 +5201,13 @@
               <a:t>▸  </a:t>
             </a:r>
             <a:r>
-              <a:rPr sz="1400">
+              <a:rPr sz="1500">
                 <a:solidFill>
                   <a:srgbClr val="23426B"/>
                 </a:solidFill>
                 <a:latin typeface="Segoe UI"/>
               </a:rPr>
-              <a:t>React 19 + Vite 7 + TypeScript</a:t>
+              <a:t>React 19 · Vite 7 · TypeScript</a:t>
             </a:r>
           </a:p>
           <a:p>
@@ -5216,11 +5216,11 @@
                 <a:spcPct val="105000"/>
               </a:lnSpc>
               <a:spcAft>
-                <a:spcPts val="1100"/>
+                <a:spcPts val="1400"/>
               </a:spcAft>
             </a:pPr>
             <a:r>
-              <a:rPr sz="1400" b="1">
+              <a:rPr sz="1500" b="1">
                 <a:solidFill>
                   <a:srgbClr val="2E93AE"/>
                 </a:solidFill>
@@ -5229,13 +5229,13 @@
               <a:t>▸  </a:t>
             </a:r>
             <a:r>
-              <a:rPr sz="1400">
+              <a:rPr sz="1500">
                 <a:solidFill>
                   <a:srgbClr val="23426B"/>
                 </a:solidFill>
                 <a:latin typeface="Segoe UI"/>
               </a:rPr>
-              <a:t>Tailwind CSS 4 &amp; Ant Design cho UI</a:t>
+              <a:t>Tailwind CSS · Ant Design</a:t>
             </a:r>
           </a:p>
           <a:p>
@@ -5244,11 +5244,11 @@
                 <a:spcPct val="105000"/>
               </a:lnSpc>
               <a:spcAft>
-                <a:spcPts val="1100"/>
+                <a:spcPts val="1400"/>
               </a:spcAft>
             </a:pPr>
             <a:r>
-              <a:rPr sz="1400" b="1">
+              <a:rPr sz="1500" b="1">
                 <a:solidFill>
                   <a:srgbClr val="2E93AE"/>
                 </a:solidFill>
@@ -5257,13 +5257,13 @@
               <a:t>▸  </a:t>
             </a:r>
             <a:r>
-              <a:rPr sz="1400">
+              <a:rPr sz="1500">
                 <a:solidFill>
                   <a:srgbClr val="23426B"/>
                 </a:solidFill>
                 <a:latin typeface="Segoe UI"/>
               </a:rPr>
-              <a:t>Redux Toolkit + React Router</a:t>
+              <a:t>Redux Toolkit · React Router</a:t>
             </a:r>
           </a:p>
           <a:p>
@@ -5272,11 +5272,11 @@
                 <a:spcPct val="105000"/>
               </a:lnSpc>
               <a:spcAft>
-                <a:spcPts val="1100"/>
+                <a:spcPts val="1400"/>
               </a:spcAft>
             </a:pPr>
             <a:r>
-              <a:rPr sz="1400" b="1">
+              <a:rPr sz="1500" b="1">
                 <a:solidFill>
                   <a:srgbClr val="2E93AE"/>
                 </a:solidFill>
@@ -5285,13 +5285,13 @@
               <a:t>▸  </a:t>
             </a:r>
             <a:r>
-              <a:rPr sz="1400">
+              <a:rPr sz="1500">
                 <a:solidFill>
                   <a:srgbClr val="23426B"/>
                 </a:solidFill>
                 <a:latin typeface="Segoe UI"/>
               </a:rPr>
-              <a:t>STOMP/SockJS realtime qua singleton WebSocket</a:t>
+              <a:t>Realtime STOMP / SockJS</a:t>
             </a:r>
           </a:p>
           <a:p>
@@ -5300,11 +5300,11 @@
                 <a:spcPct val="105000"/>
               </a:lnSpc>
               <a:spcAft>
-                <a:spcPts val="1100"/>
+                <a:spcPts val="1400"/>
               </a:spcAft>
             </a:pPr>
             <a:r>
-              <a:rPr sz="1400" b="1">
+              <a:rPr sz="1500" b="1">
                 <a:solidFill>
                   <a:srgbClr val="2E93AE"/>
                 </a:solidFill>
@@ -5313,13 +5313,13 @@
               <a:t>▸  </a:t>
             </a:r>
             <a:r>
-              <a:rPr sz="1400">
+              <a:rPr sz="1500">
                 <a:solidFill>
                   <a:srgbClr val="23426B"/>
                 </a:solidFill>
                 <a:latin typeface="Segoe UI"/>
               </a:rPr>
-              <a:t>Xác thực bằng cookie trình duyệt</a:t>
+              <a:t>Xác thực qua cookie</a:t>
             </a:r>
           </a:p>
           <a:p>
@@ -5328,11 +5328,11 @@
                 <a:spcPct val="105000"/>
               </a:lnSpc>
               <a:spcAft>
-                <a:spcPts val="1100"/>
+                <a:spcPts val="1400"/>
               </a:spcAft>
             </a:pPr>
             <a:r>
-              <a:rPr sz="1400" b="1">
+              <a:rPr sz="1500" b="1">
                 <a:solidFill>
                   <a:srgbClr val="2E93AE"/>
                 </a:solidFill>
@@ -5341,13 +5341,13 @@
               <a:t>▸  </a:t>
             </a:r>
             <a:r>
-              <a:rPr sz="1400">
+              <a:rPr sz="1500">
                 <a:solidFill>
                   <a:srgbClr val="23426B"/>
                 </a:solidFill>
                 <a:latin typeface="Segoe UI"/>
               </a:rPr>
-              <a:t>Vite proxy: /api &amp; /ws → backend:8080</a:t>
+              <a:t>Vite proxy → backend:8080</a:t>
             </a:r>
           </a:p>
         </p:txBody>
@@ -5507,8 +5507,8 @@
         </p:nvSpPr>
         <p:spPr>
           <a:xfrm>
-            <a:off x="6400800" y="2697480"/>
-            <a:ext cx="4800600" cy="3200400"/>
+            <a:off x="6400800" y="2788920"/>
+            <a:ext cx="4800600" cy="3108960"/>
           </a:xfrm>
           <a:prstGeom prst="rect">
             <a:avLst/>
@@ -5526,11 +5526,11 @@
                 <a:spcPct val="105000"/>
               </a:lnSpc>
               <a:spcAft>
-                <a:spcPts val="1100"/>
+                <a:spcPts val="1400"/>
               </a:spcAft>
             </a:pPr>
             <a:r>
-              <a:rPr sz="1400" b="1">
+              <a:rPr sz="1500" b="1">
                 <a:solidFill>
                   <a:srgbClr val="3A9BCE"/>
                 </a:solidFill>
@@ -5539,13 +5539,13 @@
               <a:t>▸  </a:t>
             </a:r>
             <a:r>
-              <a:rPr sz="1400">
+              <a:rPr sz="1500">
                 <a:solidFill>
                   <a:srgbClr val="23426B"/>
                 </a:solidFill>
                 <a:latin typeface="Segoe UI"/>
               </a:rPr>
-              <a:t>Expo 54 + React Native 0.81 + Expo Router</a:t>
+              <a:t>Expo 54 · React Native · Router</a:t>
             </a:r>
           </a:p>
           <a:p>
@@ -5554,11 +5554,11 @@
                 <a:spcPct val="105000"/>
               </a:lnSpc>
               <a:spcAft>
-                <a:spcPts val="1100"/>
+                <a:spcPts val="1400"/>
               </a:spcAft>
             </a:pPr>
             <a:r>
-              <a:rPr sz="1400" b="1">
+              <a:rPr sz="1500" b="1">
                 <a:solidFill>
                   <a:srgbClr val="3A9BCE"/>
                 </a:solidFill>
@@ -5567,13 +5567,13 @@
               <a:t>▸  </a:t>
             </a:r>
             <a:r>
-              <a:rPr sz="1400">
+              <a:rPr sz="1500">
                 <a:solidFill>
                   <a:srgbClr val="23426B"/>
                 </a:solidFill>
                 <a:latin typeface="Segoe UI"/>
               </a:rPr>
-              <a:t>Expo Secure Store lưu token an toàn</a:t>
+              <a:t>Secure Store lưu token</a:t>
             </a:r>
           </a:p>
           <a:p>
@@ -5582,11 +5582,11 @@
                 <a:spcPct val="105000"/>
               </a:lnSpc>
               <a:spcAft>
-                <a:spcPts val="1100"/>
+                <a:spcPts val="1400"/>
               </a:spcAft>
             </a:pPr>
             <a:r>
-              <a:rPr sz="1400" b="1">
+              <a:rPr sz="1500" b="1">
                 <a:solidFill>
                   <a:srgbClr val="3A9BCE"/>
                 </a:solidFill>
@@ -5595,13 +5595,13 @@
               <a:t>▸  </a:t>
             </a:r>
             <a:r>
-              <a:rPr sz="1400">
+              <a:rPr sz="1500">
                 <a:solidFill>
                   <a:srgbClr val="23426B"/>
                 </a:solidFill>
                 <a:latin typeface="Segoe UI"/>
               </a:rPr>
-              <a:t>Expo Camera: quét QR &amp; chụp ảnh</a:t>
+              <a:t>Camera: quét QR · chụp ảnh</a:t>
             </a:r>
           </a:p>
           <a:p>
@@ -5610,11 +5610,11 @@
                 <a:spcPct val="105000"/>
               </a:lnSpc>
               <a:spcAft>
-                <a:spcPts val="1100"/>
+                <a:spcPts val="1400"/>
               </a:spcAft>
             </a:pPr>
             <a:r>
-              <a:rPr sz="1400" b="1">
+              <a:rPr sz="1500" b="1">
                 <a:solidFill>
                   <a:srgbClr val="3A9BCE"/>
                 </a:solidFill>
@@ -5623,13 +5623,13 @@
               <a:t>▸  </a:t>
             </a:r>
             <a:r>
-              <a:rPr sz="1400">
+              <a:rPr sz="1500">
                 <a:solidFill>
                   <a:srgbClr val="23426B"/>
                 </a:solidFill>
                 <a:latin typeface="Segoe UI"/>
               </a:rPr>
-              <a:t>Đồng bộ chat realtime qua WebSocket</a:t>
+              <a:t>Đồng bộ chat realtime</a:t>
             </a:r>
           </a:p>
           <a:p>
@@ -5638,11 +5638,11 @@
                 <a:spcPct val="105000"/>
               </a:lnSpc>
               <a:spcAft>
-                <a:spcPts val="1100"/>
+                <a:spcPts val="1400"/>
               </a:spcAft>
             </a:pPr>
             <a:r>
-              <a:rPr sz="1400" b="1">
+              <a:rPr sz="1500" b="1">
                 <a:solidFill>
                   <a:srgbClr val="3A9BCE"/>
                 </a:solidFill>
@@ -5651,13 +5651,13 @@
               <a:t>▸  </a:t>
             </a:r>
             <a:r>
-              <a:rPr sz="1400">
+              <a:rPr sz="1500">
                 <a:solidFill>
                   <a:srgbClr val="23426B"/>
                 </a:solidFill>
                 <a:latin typeface="Segoe UI"/>
               </a:rPr>
-              <a:t>Axios client tự refresh token</a:t>
+              <a:t>Axios tự refresh token</a:t>
             </a:r>
           </a:p>
           <a:p>
@@ -5666,11 +5666,11 @@
                 <a:spcPct val="105000"/>
               </a:lnSpc>
               <a:spcAft>
-                <a:spcPts val="1100"/>
+                <a:spcPts val="1400"/>
               </a:spcAft>
             </a:pPr>
             <a:r>
-              <a:rPr sz="1400" b="1">
+              <a:rPr sz="1500" b="1">
                 <a:solidFill>
                   <a:srgbClr val="3A9BCE"/>
                 </a:solidFill>
@@ -5679,13 +5679,13 @@
               <a:t>▸  </a:t>
             </a:r>
             <a:r>
-              <a:rPr sz="1400">
+              <a:rPr sz="1500">
                 <a:solidFill>
                   <a:srgbClr val="23426B"/>
                 </a:solidFill>
                 <a:latin typeface="Segoe UI"/>
               </a:rPr>
-              <a:t>Tự phát hiện backend qua LAN host (Expo)</a:t>
+              <a:t>Tự dò backend qua LAN</a:t>
             </a:r>
           </a:p>
         </p:txBody>
@@ -9561,13 +9561,13 @@
               </a:lnSpc>
             </a:pPr>
             <a:r>
-              <a:rPr sz="1300" b="0" i="0">
+              <a:rPr sz="1400" b="1" i="0">
                 <a:solidFill>
                   <a:srgbClr val="23426B"/>
                 </a:solidFill>
                 <a:latin typeface="Segoe UI"/>
               </a:rPr>
-              <a:t>Kết hợp nhiều loại CSDL để khai thác tối đa ưu điểm riêng của từng công nghệ.</a:t>
+              <a:t>Mỗi loại CSDL cho đúng một loại dữ liệu</a:t>
             </a:r>
           </a:p>
         </p:txBody>
@@ -11542,7 +11542,7 @@
                 </a:solidFill>
                 <a:latin typeface="Segoe UI"/>
               </a:rPr>
-              <a:t>Cache cửa sổ trượt cho lịch sử tin nhắn — tăng tốc tải, giảm truy vấn trực tiếp tới DB.</a:t>
+              <a:t>Cache lịch sử tin nhắn · ít query DB</a:t>
             </a:r>
           </a:p>
         </p:txBody>
@@ -11827,7 +11827,7 @@
                 </a:solidFill>
                 <a:latin typeface="Segoe UI"/>
               </a:rPr>
-              <a:t>Phân trang theo mốc thời gian — xử lý tốt khi người dùng xóa lịch sử hội thoại, hạn chế truy vấn dư thừa.</a:t>
+              <a:t>Phân trang theo thời gian · xử lý xóa lịch sử</a:t>
             </a:r>
           </a:p>
         </p:txBody>
@@ -12112,7 +12112,7 @@
                 </a:solidFill>
                 <a:latin typeface="Segoe UI"/>
               </a:rPr>
-              <a:t>Chỉ mục kết hợp trên MongoDB cho truy vấn newsfeed — tăng tốc tải các danh sách lớn.</a:t>
+              <a:t>Index kết hợp · tăng tốc newsfeed</a:t>
             </a:r>
           </a:p>
         </p:txBody>
@@ -12397,7 +12397,7 @@
                 </a:solidFill>
                 <a:latin typeface="Segoe UI"/>
               </a:rPr>
-              <a:t>Cache thông tin thành viên và người dùng — giảm tải truy vấn lặp lại nhiều lần.</a:t>
+              <a:t>Cache user/thành viên · giảm query lặp</a:t>
             </a:r>
           </a:p>
         </p:txBody>
@@ -12682,7 +12682,7 @@
                 </a:solidFill>
                 <a:latin typeface="Segoe UI"/>
               </a:rPr>
-              <a:t>Tối ưu truy vấn, loại bỏ vấn đề N+1 — giảm số lần round-trip tới cơ sở dữ liệu.</a:t>
+              <a:t>Loại bỏ N+1 · ít round-trip DB</a:t>
             </a:r>
           </a:p>
         </p:txBody>
@@ -12967,7 +12967,7 @@
                 </a:solidFill>
                 <a:latin typeface="Segoe UI"/>
               </a:rPr>
-              <a:t>Kiến trúc hỗ trợ mở rộng theo chiều ngang — sẵn sàng phục vụ nhiều người dùng đồng thời.</a:t>
+              <a:t>Mở rộng chiều ngang · nhiều user</a:t>
             </a:r>
           </a:p>
         </p:txBody>
@@ -15336,7 +15336,7 @@
                 </a:solidFill>
                 <a:latin typeface="Segoe UI"/>
               </a:rPr>
-              <a:t>Đăng ký, đăng nhập, xác nhận, đặt lại mật khẩu, refresh token và đăng xuất do Cognito quản lý.</a:t>
+              <a:t>Đăng ký · Đăng nhập · Reset · Logout</a:t>
             </a:r>
           </a:p>
         </p:txBody>
@@ -15621,7 +15621,23 @@
                 </a:solidFill>
                 <a:latin typeface="Segoe UI"/>
               </a:rPr>
-              <a:t>Web dùng cookie trình duyệt; mobile dùng Expo Secure Store. JWT xác thực mỗi request.</a:t>
+              <a:t>Cookie (web) · Secure Store (mobile)</a:t>
+            </a:r>
+          </a:p>
+          <a:p>
+            <a:pPr algn="l">
+              <a:lnSpc>
+                <a:spcPct val="105000"/>
+              </a:lnSpc>
+            </a:pPr>
+            <a:r>
+              <a:rPr sz="1250" b="0" i="0">
+                <a:solidFill>
+                  <a:srgbClr val="23426B"/>
+                </a:solidFill>
+                <a:latin typeface="Segoe UI"/>
+              </a:rPr>
+              <a:t>JWT mỗi request</a:t>
             </a:r>
           </a:p>
         </p:txBody>
@@ -15906,7 +15922,7 @@
                 </a:solidFill>
                 <a:latin typeface="Segoe UI"/>
               </a:rPr>
-              <a:t>Ghép phiên đăng nhập web với xác nhận trên thiết bị di động qua mã QR.</a:t>
+              <a:t>Ghép phiên web ↔ xác nhận mobile</a:t>
             </a:r>
           </a:p>
         </p:txBody>
@@ -16191,7 +16207,7 @@
                 </a:solidFill>
                 <a:latin typeface="Segoe UI"/>
               </a:rPr>
-              <a:t>Axios client tự động làm mới access token khi hết hạn, duy trì phiên liền mạch.</a:t>
+              <a:t>Tự làm mới token · phiên liền mạch</a:t>
             </a:r>
           </a:p>
         </p:txBody>
@@ -17871,11 +17887,11 @@
                 <a:spcPct val="105000"/>
               </a:lnSpc>
               <a:spcAft>
-                <a:spcPts val="600"/>
+                <a:spcPts val="800"/>
               </a:spcAft>
             </a:pPr>
             <a:r>
-              <a:rPr sz="1200" b="1">
+              <a:rPr sz="1300" b="1">
                 <a:solidFill>
                   <a:srgbClr val="3A9BCE"/>
                 </a:solidFill>
@@ -17884,13 +17900,13 @@
               <a:t>▸  </a:t>
             </a:r>
             <a:r>
-              <a:rPr sz="1200">
+              <a:rPr sz="1300">
                 <a:solidFill>
                   <a:srgbClr val="23426B"/>
                 </a:solidFill>
                 <a:latin typeface="Segoe UI"/>
               </a:rPr>
-              <a:t>Validate SĐT (10–11 số) &amp; mật khẩu (6–50 ký tự) trước khi gọi API; hiển thị SuccessModal cho trạng thái loading/success/error.</a:t>
+              <a:t>Validate SĐT &amp; mật khẩu trước khi gọi API  ·  SuccessModal: loading / success / error</a:t>
             </a:r>
           </a:p>
           <a:p>
@@ -17899,11 +17915,11 @@
                 <a:spcPct val="105000"/>
               </a:lnSpc>
               <a:spcAft>
-                <a:spcPts val="600"/>
+                <a:spcPts val="800"/>
               </a:spcAft>
             </a:pPr>
             <a:r>
-              <a:rPr sz="1200" b="1">
+              <a:rPr sz="1300" b="1">
                 <a:solidFill>
                   <a:srgbClr val="3A9BCE"/>
                 </a:solidFill>
@@ -17912,13 +17928,13 @@
               <a:t>▸  </a:t>
             </a:r>
             <a:r>
-              <a:rPr sz="1200">
+              <a:rPr sz="1300">
                 <a:solidFill>
                   <a:srgbClr val="23426B"/>
                 </a:solidFill>
                 <a:latin typeface="Segoe UI"/>
               </a:rPr>
-              <a:t>Sau xác nhận thành công → điều hướng tới màn hình đăng nhập / verify-otp.</a:t>
+              <a:t>Xác nhận xong → điều hướng đăng nhập</a:t>
             </a:r>
           </a:p>
         </p:txBody>
@@ -19359,13 +19375,13 @@
               </a:lnSpc>
             </a:pPr>
             <a:r>
-              <a:rPr sz="1200" b="0" i="0">
+              <a:rPr sz="1250" b="1" i="0">
                 <a:solidFill>
                   <a:srgbClr val="23426B"/>
                 </a:solidFill>
                 <a:latin typeface="Segoe UI"/>
               </a:rPr>
-              <a:t>🔐  Kết quả: phiên web được cấp access token sau khi mobile xác nhận — không cần nhập lại mật khẩu trên web.</a:t>
+              <a:t>🔐  Web nhận access token sau khi mobile xác nhận — không cần nhập lại mật khẩu.</a:t>
             </a:r>
           </a:p>
         </p:txBody>
@@ -20122,7 +20138,7 @@
                 </a:solidFill>
                 <a:latin typeface="Segoe UI"/>
               </a:rPr>
-              <a:t>Tạo, sửa, xóa, xem bài viết; feed theo hồ sơ người dùng.</a:t>
+              <a:t>Tạo · Sửa · Xóa · Xem feed</a:t>
             </a:r>
           </a:p>
         </p:txBody>
@@ -20407,7 +20423,7 @@
                 </a:solidFill>
                 <a:latin typeface="Segoe UI"/>
               </a:rPr>
-              <a:t>Tải media qua luồng presigned URL (POST /posts/upload-url).</a:t>
+              <a:t>Presigned URL · upload trực tiếp</a:t>
             </a:r>
           </a:p>
         </p:txBody>
@@ -20692,7 +20708,7 @@
                 </a:solidFill>
                 <a:latin typeface="Segoe UI"/>
               </a:rPr>
-              <a:t>Bình luận, trả lời lồng nhau, cảm xúc (reactions), bài đã lưu.</a:t>
+              <a:t>Bình luận · Reply · Reaction</a:t>
             </a:r>
           </a:p>
         </p:txBody>
@@ -20977,7 +20993,7 @@
                 </a:solidFill>
                 <a:latin typeface="Segoe UI"/>
               </a:rPr>
-              <a:t>Bài được gắn thẻ và bộ sưu tập bài đã lưu của người dùng.</a:t>
+              <a:t>Gắn thẻ · Bài đã lưu</a:t>
             </a:r>
           </a:p>
         </p:txBody>
@@ -23856,8 +23872,8 @@
         </p:nvSpPr>
         <p:spPr>
           <a:xfrm>
-            <a:off x="1005840" y="2697480"/>
-            <a:ext cx="4800600" cy="3108960"/>
+            <a:off x="1005840" y="2834640"/>
+            <a:ext cx="4800600" cy="3017520"/>
           </a:xfrm>
           <a:prstGeom prst="rect">
             <a:avLst/>
@@ -23875,11 +23891,11 @@
                 <a:spcPct val="105000"/>
               </a:lnSpc>
               <a:spcAft>
-                <a:spcPts val="1200"/>
+                <a:spcPts val="1600"/>
               </a:spcAft>
             </a:pPr>
             <a:r>
-              <a:rPr sz="1400" b="1">
+              <a:rPr sz="1550" b="1">
                 <a:solidFill>
                   <a:srgbClr val="8FBDEE"/>
                 </a:solidFill>
@@ -23888,13 +23904,13 @@
               <a:t>▸  </a:t>
             </a:r>
             <a:r>
-              <a:rPr sz="1400">
+              <a:rPr sz="1550">
                 <a:solidFill>
                   <a:srgbClr val="23426B"/>
                 </a:solidFill>
                 <a:latin typeface="Segoe UI"/>
               </a:rPr>
-              <a:t>Tạo story &amp; lấy feed story</a:t>
+              <a:t>Tạo story · Feed story</a:t>
             </a:r>
           </a:p>
           <a:p>
@@ -23903,11 +23919,11 @@
                 <a:spcPct val="105000"/>
               </a:lnSpc>
               <a:spcAft>
-                <a:spcPts val="1200"/>
+                <a:spcPts val="1600"/>
               </a:spcAft>
             </a:pPr>
             <a:r>
-              <a:rPr sz="1400" b="1">
+              <a:rPr sz="1550" b="1">
                 <a:solidFill>
                   <a:srgbClr val="8FBDEE"/>
                 </a:solidFill>
@@ -23916,13 +23932,13 @@
               <a:t>▸  </a:t>
             </a:r>
             <a:r>
-              <a:rPr sz="1400">
+              <a:rPr sz="1550">
                 <a:solidFill>
                   <a:srgbClr val="23426B"/>
                 </a:solidFill>
                 <a:latin typeface="Segoe UI"/>
               </a:rPr>
-              <a:t>Danh sách người xem story</a:t>
+              <a:t>Người xem story</a:t>
             </a:r>
           </a:p>
           <a:p>
@@ -23931,11 +23947,11 @@
                 <a:spcPct val="105000"/>
               </a:lnSpc>
               <a:spcAft>
-                <a:spcPts val="1200"/>
+                <a:spcPts val="1600"/>
               </a:spcAft>
             </a:pPr>
             <a:r>
-              <a:rPr sz="1400" b="1">
+              <a:rPr sz="1550" b="1">
                 <a:solidFill>
                   <a:srgbClr val="8FBDEE"/>
                 </a:solidFill>
@@ -23944,13 +23960,13 @@
               <a:t>▸  </a:t>
             </a:r>
             <a:r>
-              <a:rPr sz="1400">
+              <a:rPr sz="1550">
                 <a:solidFill>
                   <a:srgbClr val="23426B"/>
                 </a:solidFill>
                 <a:latin typeface="Segoe UI"/>
               </a:rPr>
-              <a:t>Reaction trên story</a:t>
+              <a:t>Reaction story</a:t>
             </a:r>
           </a:p>
           <a:p>
@@ -23959,11 +23975,11 @@
                 <a:spcPct val="105000"/>
               </a:lnSpc>
               <a:spcAft>
-                <a:spcPts val="1200"/>
+                <a:spcPts val="1600"/>
               </a:spcAft>
             </a:pPr>
             <a:r>
-              <a:rPr sz="1400" b="1">
+              <a:rPr sz="1550" b="1">
                 <a:solidFill>
                   <a:srgbClr val="8FBDEE"/>
                 </a:solidFill>
@@ -23972,13 +23988,13 @@
               <a:t>▸  </a:t>
             </a:r>
             <a:r>
-              <a:rPr sz="1400">
+              <a:rPr sz="1550">
                 <a:solidFill>
                   <a:srgbClr val="23426B"/>
                 </a:solidFill>
                 <a:latin typeface="Segoe UI"/>
               </a:rPr>
-              <a:t>Highlights (lưu nổi bật)</a:t>
+              <a:t>Highlights</a:t>
             </a:r>
           </a:p>
           <a:p>
@@ -23987,11 +24003,11 @@
                 <a:spcPct val="105000"/>
               </a:lnSpc>
               <a:spcAft>
-                <a:spcPts val="1200"/>
+                <a:spcPts val="1600"/>
               </a:spcAft>
             </a:pPr>
             <a:r>
-              <a:rPr sz="1400" b="1">
+              <a:rPr sz="1550" b="1">
                 <a:solidFill>
                   <a:srgbClr val="8FBDEE"/>
                 </a:solidFill>
@@ -24000,7 +24016,7 @@
               <a:t>▸  </a:t>
             </a:r>
             <a:r>
-              <a:rPr sz="1400">
+              <a:rPr sz="1550">
                 <a:solidFill>
                   <a:srgbClr val="23426B"/>
                 </a:solidFill>
@@ -24166,8 +24182,8 @@
         </p:nvSpPr>
         <p:spPr>
           <a:xfrm>
-            <a:off x="6400800" y="2697480"/>
-            <a:ext cx="4800600" cy="3108960"/>
+            <a:off x="6400800" y="2834640"/>
+            <a:ext cx="4800600" cy="3017520"/>
           </a:xfrm>
           <a:prstGeom prst="rect">
             <a:avLst/>
@@ -24185,11 +24201,11 @@
                 <a:spcPct val="105000"/>
               </a:lnSpc>
               <a:spcAft>
-                <a:spcPts val="1200"/>
+                <a:spcPts val="1600"/>
               </a:spcAft>
             </a:pPr>
             <a:r>
-              <a:rPr sz="1400" b="1">
+              <a:rPr sz="1550" b="1">
                 <a:solidFill>
                   <a:srgbClr val="7A82E6"/>
                 </a:solidFill>
@@ -24198,13 +24214,13 @@
               <a:t>▸  </a:t>
             </a:r>
             <a:r>
-              <a:rPr sz="1400">
+              <a:rPr sz="1550">
                 <a:solidFill>
                   <a:srgbClr val="23426B"/>
                 </a:solidFill>
                 <a:latin typeface="Segoe UI"/>
               </a:rPr>
-              <a:t>Trang hồ sơ: bài viết, bài đã lưu, bài gắn thẻ</a:t>
+              <a:t>Hồ sơ: bài viết · đã lưu · gắn thẻ</a:t>
             </a:r>
           </a:p>
           <a:p>
@@ -24213,11 +24229,11 @@
                 <a:spcPct val="105000"/>
               </a:lnSpc>
               <a:spcAft>
-                <a:spcPts val="1200"/>
+                <a:spcPts val="1600"/>
               </a:spcAft>
             </a:pPr>
             <a:r>
-              <a:rPr sz="1400" b="1">
+              <a:rPr sz="1550" b="1">
                 <a:solidFill>
                   <a:srgbClr val="7A82E6"/>
                 </a:solidFill>
@@ -24226,13 +24242,13 @@
               <a:t>▸  </a:t>
             </a:r>
             <a:r>
-              <a:rPr sz="1400">
+              <a:rPr sz="1550">
                 <a:solidFill>
                   <a:srgbClr val="23426B"/>
                 </a:solidFill>
                 <a:latin typeface="Segoe UI"/>
               </a:rPr>
-              <a:t>Danh sách người bị chặn</a:t>
+              <a:t>Người bị chặn</a:t>
             </a:r>
           </a:p>
           <a:p>
@@ -24241,11 +24257,11 @@
                 <a:spcPct val="105000"/>
               </a:lnSpc>
               <a:spcAft>
-                <a:spcPts val="1200"/>
+                <a:spcPts val="1600"/>
               </a:spcAft>
             </a:pPr>
             <a:r>
-              <a:rPr sz="1400" b="1">
+              <a:rPr sz="1550" b="1">
                 <a:solidFill>
                   <a:srgbClr val="7A82E6"/>
                 </a:solidFill>
@@ -24254,13 +24270,13 @@
               <a:t>▸  </a:t>
             </a:r>
             <a:r>
-              <a:rPr sz="1400">
+              <a:rPr sz="1550">
                 <a:solidFill>
                   <a:srgbClr val="23426B"/>
                 </a:solidFill>
                 <a:latin typeface="Segoe UI"/>
               </a:rPr>
-              <a:t>Chỉnh sửa thông tin tài khoản</a:t>
+              <a:t>Sửa thông tin tài khoản</a:t>
             </a:r>
           </a:p>
           <a:p>
@@ -24269,11 +24285,11 @@
                 <a:spcPct val="105000"/>
               </a:lnSpc>
               <a:spcAft>
-                <a:spcPts val="1200"/>
+                <a:spcPts val="1600"/>
               </a:spcAft>
             </a:pPr>
             <a:r>
-              <a:rPr sz="1400" b="1">
+              <a:rPr sz="1550" b="1">
                 <a:solidFill>
                   <a:srgbClr val="7A82E6"/>
                 </a:solidFill>
@@ -24282,13 +24298,13 @@
               <a:t>▸  </a:t>
             </a:r>
             <a:r>
-              <a:rPr sz="1400">
+              <a:rPr sz="1550">
                 <a:solidFill>
                   <a:srgbClr val="23426B"/>
                 </a:solidFill>
                 <a:latin typeface="Segoe UI"/>
               </a:rPr>
-              <a:t>Quyền riêng tư hồ sơ (Profile privacy)</a:t>
+              <a:t>Quyền riêng tư hồ sơ</a:t>
             </a:r>
           </a:p>
           <a:p>
@@ -24297,11 +24313,11 @@
                 <a:spcPct val="105000"/>
               </a:lnSpc>
               <a:spcAft>
-                <a:spcPts val="1200"/>
+                <a:spcPts val="1600"/>
               </a:spcAft>
             </a:pPr>
             <a:r>
-              <a:rPr sz="1400" b="1">
+              <a:rPr sz="1550" b="1">
                 <a:solidFill>
                   <a:srgbClr val="7A82E6"/>
                 </a:solidFill>
@@ -24310,13 +24326,13 @@
               <a:t>▸  </a:t>
             </a:r>
             <a:r>
-              <a:rPr sz="1400">
+              <a:rPr sz="1550">
                 <a:solidFill>
                   <a:srgbClr val="23426B"/>
                 </a:solidFill>
                 <a:latin typeface="Segoe UI"/>
               </a:rPr>
-              <a:t>Hiển thị ngày sinh &amp; giới tính</a:t>
+              <a:t>Ngày sinh · giới tính</a:t>
             </a:r>
           </a:p>
         </p:txBody>
@@ -24948,8 +24964,8 @@
         </p:nvSpPr>
         <p:spPr>
           <a:xfrm>
-            <a:off x="1005840" y="2697480"/>
-            <a:ext cx="4800600" cy="3108960"/>
+            <a:off x="1005840" y="2834640"/>
+            <a:ext cx="4800600" cy="3017520"/>
           </a:xfrm>
           <a:prstGeom prst="rect">
             <a:avLst/>
@@ -24967,11 +24983,11 @@
                 <a:spcPct val="105000"/>
               </a:lnSpc>
               <a:spcAft>
-                <a:spcPts val="1100"/>
+                <a:spcPts val="1600"/>
               </a:spcAft>
             </a:pPr>
             <a:r>
-              <a:rPr sz="1350" b="1">
+              <a:rPr sz="1550" b="1">
                 <a:solidFill>
                   <a:srgbClr val="2E93AE"/>
                 </a:solidFill>
@@ -24980,13 +24996,13 @@
               <a:t>▸  </a:t>
             </a:r>
             <a:r>
-              <a:rPr sz="1350">
+              <a:rPr sz="1550">
                 <a:solidFill>
                   <a:srgbClr val="23426B"/>
                 </a:solidFill>
                 <a:latin typeface="Segoe UI"/>
               </a:rPr>
-              <a:t>Gửi, chấp nhận, từ chối, hủy lời mời kết bạn</a:t>
+              <a:t>Gửi · Chấp nhận · Từ chối lời mời</a:t>
             </a:r>
           </a:p>
           <a:p>
@@ -24995,11 +25011,11 @@
                 <a:spcPct val="105000"/>
               </a:lnSpc>
               <a:spcAft>
-                <a:spcPts val="1100"/>
+                <a:spcPts val="1600"/>
               </a:spcAft>
             </a:pPr>
             <a:r>
-              <a:rPr sz="1350" b="1">
+              <a:rPr sz="1550" b="1">
                 <a:solidFill>
                   <a:srgbClr val="2E93AE"/>
                 </a:solidFill>
@@ -25008,13 +25024,13 @@
               <a:t>▸  </a:t>
             </a:r>
             <a:r>
-              <a:rPr sz="1350">
+              <a:rPr sz="1550">
                 <a:solidFill>
                   <a:srgbClr val="23426B"/>
                 </a:solidFill>
                 <a:latin typeface="Segoe UI"/>
               </a:rPr>
-              <a:t>Danh sách bạn bè &amp; lời mời đến/đi</a:t>
+              <a:t>Danh sách bạn · lời mời</a:t>
             </a:r>
           </a:p>
           <a:p>
@@ -25023,11 +25039,11 @@
                 <a:spcPct val="105000"/>
               </a:lnSpc>
               <a:spcAft>
-                <a:spcPts val="1100"/>
+                <a:spcPts val="1600"/>
               </a:spcAft>
             </a:pPr>
             <a:r>
-              <a:rPr sz="1350" b="1">
+              <a:rPr sz="1550" b="1">
                 <a:solidFill>
                   <a:srgbClr val="2E93AE"/>
                 </a:solidFill>
@@ -25036,13 +25052,13 @@
               <a:t>▸  </a:t>
             </a:r>
             <a:r>
-              <a:rPr sz="1350">
+              <a:rPr sz="1550">
                 <a:solidFill>
                   <a:srgbClr val="23426B"/>
                 </a:solidFill>
                 <a:latin typeface="Segoe UI"/>
               </a:rPr>
-              <a:t>Chặn / bỏ chặn người dùng</a:t>
+              <a:t>Chặn / Bỏ chặn</a:t>
             </a:r>
           </a:p>
           <a:p>
@@ -25051,11 +25067,11 @@
                 <a:spcPct val="105000"/>
               </a:lnSpc>
               <a:spcAft>
-                <a:spcPts val="1100"/>
+                <a:spcPts val="1600"/>
               </a:spcAft>
             </a:pPr>
             <a:r>
-              <a:rPr sz="1350" b="1">
+              <a:rPr sz="1550" b="1">
                 <a:solidFill>
                   <a:srgbClr val="2E93AE"/>
                 </a:solidFill>
@@ -25064,13 +25080,13 @@
               <a:t>▸  </a:t>
             </a:r>
             <a:r>
-              <a:rPr sz="1350">
+              <a:rPr sz="1550">
                 <a:solidFill>
                   <a:srgbClr val="23426B"/>
                 </a:solidFill>
                 <a:latin typeface="Segoe UI"/>
               </a:rPr>
-              <a:t>Đếm số bạn bè realtime trên hồ sơ</a:t>
+              <a:t>Đếm bạn bè realtime</a:t>
             </a:r>
           </a:p>
           <a:p>
@@ -25079,11 +25095,11 @@
                 <a:spcPct val="105000"/>
               </a:lnSpc>
               <a:spcAft>
-                <a:spcPts val="1100"/>
+                <a:spcPts val="1600"/>
               </a:spcAft>
             </a:pPr>
             <a:r>
-              <a:rPr sz="1350" b="1">
+              <a:rPr sz="1550" b="1">
                 <a:solidFill>
                   <a:srgbClr val="2E93AE"/>
                 </a:solidFill>
@@ -25092,13 +25108,13 @@
               <a:t>▸  </a:t>
             </a:r>
             <a:r>
-              <a:rPr sz="1350">
+              <a:rPr sz="1550">
                 <a:solidFill>
                   <a:srgbClr val="23426B"/>
                 </a:solidFill>
                 <a:latin typeface="Segoe UI"/>
               </a:rPr>
-              <a:t>Luồng chặn người dùng trong chat (read-only)</a:t>
+              <a:t>Chặn trong chat (read-only)</a:t>
             </a:r>
           </a:p>
         </p:txBody>
@@ -25258,8 +25274,8 @@
         </p:nvSpPr>
         <p:spPr>
           <a:xfrm>
-            <a:off x="6400800" y="2697480"/>
-            <a:ext cx="4800600" cy="3108960"/>
+            <a:off x="6400800" y="2834640"/>
+            <a:ext cx="4800600" cy="3017520"/>
           </a:xfrm>
           <a:prstGeom prst="rect">
             <a:avLst/>
@@ -25277,11 +25293,11 @@
                 <a:spcPct val="105000"/>
               </a:lnSpc>
               <a:spcAft>
-                <a:spcPts val="1100"/>
+                <a:spcPts val="1600"/>
               </a:spcAft>
             </a:pPr>
             <a:r>
-              <a:rPr sz="1350" b="1">
+              <a:rPr sz="1550" b="1">
                 <a:solidFill>
                   <a:srgbClr val="7A82E6"/>
                 </a:solidFill>
@@ -25290,13 +25306,13 @@
               <a:t>▸  </a:t>
             </a:r>
             <a:r>
-              <a:rPr sz="1350">
+              <a:rPr sz="1550">
                 <a:solidFill>
                   <a:srgbClr val="23426B"/>
                 </a:solidFill>
                 <a:latin typeface="Segoe UI"/>
               </a:rPr>
-              <a:t>Tạo, cập nhật, xóa, thích, theo dõi trang</a:t>
+              <a:t>Tạo · Sửa · Thích · Theo dõi</a:t>
             </a:r>
           </a:p>
           <a:p>
@@ -25305,11 +25321,11 @@
                 <a:spcPct val="105000"/>
               </a:lnSpc>
               <a:spcAft>
-                <a:spcPts val="1100"/>
+                <a:spcPts val="1600"/>
               </a:spcAft>
             </a:pPr>
             <a:r>
-              <a:rPr sz="1350" b="1">
+              <a:rPr sz="1550" b="1">
                 <a:solidFill>
                   <a:srgbClr val="7A82E6"/>
                 </a:solidFill>
@@ -25318,13 +25334,13 @@
               <a:t>▸  </a:t>
             </a:r>
             <a:r>
-              <a:rPr sz="1350">
+              <a:rPr sz="1550">
                 <a:solidFill>
                   <a:srgbClr val="23426B"/>
                 </a:solidFill>
                 <a:latin typeface="Segoe UI"/>
               </a:rPr>
-              <a:t>Bài viết trang &amp; duyệt/từ chối bài</a:t>
+              <a:t>Bài viết · duyệt/từ chối</a:t>
             </a:r>
           </a:p>
           <a:p>
@@ -25333,11 +25349,11 @@
                 <a:spcPct val="105000"/>
               </a:lnSpc>
               <a:spcAft>
-                <a:spcPts val="1100"/>
+                <a:spcPts val="1600"/>
               </a:spcAft>
             </a:pPr>
             <a:r>
-              <a:rPr sz="1350" b="1">
+              <a:rPr sz="1550" b="1">
                 <a:solidFill>
                   <a:srgbClr val="7A82E6"/>
                 </a:solidFill>
@@ -25346,13 +25362,13 @@
               <a:t>▸  </a:t>
             </a:r>
             <a:r>
-              <a:rPr sz="1350">
+              <a:rPr sz="1550">
                 <a:solidFill>
                   <a:srgbClr val="23426B"/>
                 </a:solidFill>
                 <a:latin typeface="Segoe UI"/>
               </a:rPr>
-              <a:t>Thêm/xóa thành viên, phân quyền vai trò</a:t>
+              <a:t>Thành viên · phân quyền</a:t>
             </a:r>
           </a:p>
           <a:p>
@@ -25361,11 +25377,11 @@
                 <a:spcPct val="105000"/>
               </a:lnSpc>
               <a:spcAft>
-                <a:spcPts val="1100"/>
+                <a:spcPts val="1600"/>
               </a:spcAft>
             </a:pPr>
             <a:r>
-              <a:rPr sz="1350" b="1">
+              <a:rPr sz="1550" b="1">
                 <a:solidFill>
                   <a:srgbClr val="7A82E6"/>
                 </a:solidFill>
@@ -25374,13 +25390,13 @@
               <a:t>▸  </a:t>
             </a:r>
             <a:r>
-              <a:rPr sz="1350">
+              <a:rPr sz="1550">
                 <a:solidFill>
                   <a:srgbClr val="23426B"/>
                 </a:solidFill>
                 <a:latin typeface="Segoe UI"/>
               </a:rPr>
-              <a:t>Yêu cầu tham gia &amp; duyệt yêu cầu</a:t>
+              <a:t>Yêu cầu tham gia · duyệt</a:t>
             </a:r>
           </a:p>
           <a:p>
@@ -25389,11 +25405,11 @@
                 <a:spcPct val="105000"/>
               </a:lnSpc>
               <a:spcAft>
-                <a:spcPts val="1100"/>
+                <a:spcPts val="1600"/>
               </a:spcAft>
             </a:pPr>
             <a:r>
-              <a:rPr sz="1350" b="1">
+              <a:rPr sz="1550" b="1">
                 <a:solidFill>
                   <a:srgbClr val="7A82E6"/>
                 </a:solidFill>
@@ -25402,13 +25418,13 @@
               <a:t>▸  </a:t>
             </a:r>
             <a:r>
-              <a:rPr sz="1350">
+              <a:rPr sz="1550">
                 <a:solidFill>
                   <a:srgbClr val="23426B"/>
                 </a:solidFill>
                 <a:latin typeface="Segoe UI"/>
               </a:rPr>
-              <a:t>Quản lý yêu cầu đang chờ (pending)</a:t>
+              <a:t>Quản lý pending</a:t>
             </a:r>
           </a:p>
         </p:txBody>
@@ -26165,7 +26181,7 @@
                 </a:solidFill>
                 <a:latin typeface="Segoe UI"/>
               </a:rPr>
-              <a:t>1-1 &amp; nhóm; tạo nhóm, phân trang tin nhắn.</a:t>
+              <a:t>1-1 &amp; nhóm · phân trang</a:t>
             </a:r>
           </a:p>
         </p:txBody>
@@ -26450,7 +26466,7 @@
                 </a:solidFill>
                 <a:latin typeface="Segoe UI"/>
               </a:rPr>
-              <a:t>Gửi, thu hồi (recall), xóa-cho-tôi, đã đọc.</a:t>
+              <a:t>Gửi · Thu hồi · Xóa · Đã đọc</a:t>
             </a:r>
           </a:p>
         </p:txBody>
@@ -26735,7 +26751,7 @@
                 </a:solidFill>
                 <a:latin typeface="Segoe UI"/>
               </a:rPr>
-              <a:t>Ghim tin nhắn, chỉ báo đang nhập, seen.</a:t>
+              <a:t>Ghim · Typing · Seen</a:t>
             </a:r>
           </a:p>
         </p:txBody>
@@ -27020,7 +27036,7 @@
                 </a:solidFill>
                 <a:latin typeface="Segoe UI"/>
               </a:rPr>
-              <a:t>Biệt danh, vai trò, rời/kick/giải tán nhóm.</a:t>
+              <a:t>Biệt danh · vai trò · kick/rời</a:t>
             </a:r>
           </a:p>
         </p:txBody>
@@ -29064,7 +29080,7 @@
                 </a:solidFill>
                 <a:latin typeface="Segoe UI"/>
               </a:rPr>
-              <a:t>Client publish typing qua /app/chat/{id}/typing — server fan-out tới /topic/conversation/{id}.</a:t>
+              <a:t>Typing:  client → /app/chat/{id}/typing  →  fan-out /topic/conversation/{id}</a:t>
             </a:r>
           </a:p>
         </p:txBody>
@@ -31661,13 +31677,13 @@
               </a:lnSpc>
             </a:pPr>
             <a:r>
-              <a:rPr sz="1400" b="0" i="0">
+              <a:rPr sz="1400" b="1" i="0">
                 <a:solidFill>
                   <a:srgbClr val="23426B"/>
                 </a:solidFill>
                 <a:latin typeface="Segoe UI"/>
               </a:rPr>
-              <a:t>WebSocket signaling cho các sự kiện cuộc gọi — backend đóng vai trò trung gian trao đổi tín hiệu.</a:t>
+              <a:t>WebSocket signaling  ·  backend làm trung gian trao đổi tín hiệu</a:t>
             </a:r>
           </a:p>
         </p:txBody>
@@ -32647,11 +32663,11 @@
                 <a:spcPct val="105000"/>
               </a:lnSpc>
               <a:spcAft>
-                <a:spcPts val="600"/>
+                <a:spcPts val="800"/>
               </a:spcAft>
             </a:pPr>
             <a:r>
-              <a:rPr sz="1200" b="1">
+              <a:rPr sz="1300" b="1">
                 <a:solidFill>
                   <a:srgbClr val="5470CE"/>
                 </a:solidFill>
@@ -32660,13 +32676,13 @@
               <a:t>▸  </a:t>
             </a:r>
             <a:r>
-              <a:rPr sz="1200">
+              <a:rPr sz="1300">
                 <a:solidFill>
                   <a:srgbClr val="23426B"/>
                 </a:solidFill>
                 <a:latin typeface="Segoe UI"/>
               </a:rPr>
-              <a:t>Client gửi payload qua  /app/call.signal  (Client → Server).</a:t>
+              <a:t>Client → /app/call.signal</a:t>
             </a:r>
           </a:p>
           <a:p>
@@ -32675,11 +32691,11 @@
                 <a:spcPct val="105000"/>
               </a:lnSpc>
               <a:spcAft>
-                <a:spcPts val="600"/>
+                <a:spcPts val="800"/>
               </a:spcAft>
             </a:pPr>
             <a:r>
-              <a:rPr sz="1200" b="1">
+              <a:rPr sz="1300" b="1">
                 <a:solidFill>
                   <a:srgbClr val="5470CE"/>
                 </a:solidFill>
@@ -32688,13 +32704,13 @@
               <a:t>▸  </a:t>
             </a:r>
             <a:r>
-              <a:rPr sz="1200">
+              <a:rPr sz="1300">
                 <a:solidFill>
                   <a:srgbClr val="23426B"/>
                 </a:solidFill>
                 <a:latin typeface="Segoe UI"/>
               </a:rPr>
-              <a:t>Server phát sự kiện gọi đến &amp; trạng thái qua  /topic/user/{userId}/calls  (Server → Client).</a:t>
+              <a:t>Server → /topic/user/{id}/calls</a:t>
             </a:r>
           </a:p>
         </p:txBody>
@@ -33451,7 +33467,23 @@
                 </a:solidFill>
                 <a:latin typeface="Segoe UI"/>
               </a:rPr>
-              <a:t>Người dùng phải đồng ý dùng AI trước khi backend xử lý hội thoại qua provider.  POST /api/users/me/confirm-ai</a:t>
+              <a:t>Phải đồng ý trước khi dùng AI</a:t>
+            </a:r>
+          </a:p>
+          <a:p>
+            <a:pPr algn="l">
+              <a:lnSpc>
+                <a:spcPct val="105000"/>
+              </a:lnSpc>
+            </a:pPr>
+            <a:r>
+              <a:rPr sz="1150" b="0" i="0">
+                <a:solidFill>
+                  <a:srgbClr val="23426B"/>
+                </a:solidFill>
+                <a:latin typeface="Segoe UI"/>
+              </a:rPr>
+              <a:t>POST /confirm-ai</a:t>
             </a:r>
           </a:p>
         </p:txBody>
@@ -33736,7 +33768,23 @@
                 </a:solidFill>
                 <a:latin typeface="Segoe UI"/>
               </a:rPr>
-              <a:t>Tự động tóm tắt nội dung cuộc trò chuyện dài.  POST /api/ai/summarize</a:t>
+              <a:t>Tóm tắt cuộc trò chuyện dài</a:t>
+            </a:r>
+          </a:p>
+          <a:p>
+            <a:pPr algn="l">
+              <a:lnSpc>
+                <a:spcPct val="105000"/>
+              </a:lnSpc>
+            </a:pPr>
+            <a:r>
+              <a:rPr sz="1150" b="0" i="0">
+                <a:solidFill>
+                  <a:srgbClr val="23426B"/>
+                </a:solidFill>
+                <a:latin typeface="Segoe UI"/>
+              </a:rPr>
+              <a:t>POST /ai/summarize</a:t>
             </a:r>
           </a:p>
         </p:txBody>
@@ -34021,7 +34069,23 @@
                 </a:solidFill>
                 <a:latin typeface="Segoe UI"/>
               </a:rPr>
-              <a:t>Đề xuất câu trả lời thông minh theo ngữ cảnh &amp; gợi ý nội dung.  POST /api/ai/suggestions</a:t>
+              <a:t>Gợi ý trả lời theo ngữ cảnh</a:t>
+            </a:r>
+          </a:p>
+          <a:p>
+            <a:pPr algn="l">
+              <a:lnSpc>
+                <a:spcPct val="105000"/>
+              </a:lnSpc>
+            </a:pPr>
+            <a:r>
+              <a:rPr sz="1150" b="0" i="0">
+                <a:solidFill>
+                  <a:srgbClr val="23426B"/>
+                </a:solidFill>
+                <a:latin typeface="Segoe UI"/>
+              </a:rPr>
+              <a:t>POST /ai/suggestions</a:t>
             </a:r>
           </a:p>
         </p:txBody>
@@ -34306,7 +34370,23 @@
                 </a:solidFill>
                 <a:latin typeface="Segoe UI"/>
               </a:rPr>
-              <a:t>Chuẩn tương thích OpenAI API qua Spring WebClient — đổi/mở rộng model không ảnh hưởng backend.</a:t>
+              <a:t>Chuẩn OpenAI API</a:t>
+            </a:r>
+          </a:p>
+          <a:p>
+            <a:pPr algn="l">
+              <a:lnSpc>
+                <a:spcPct val="105000"/>
+              </a:lnSpc>
+            </a:pPr>
+            <a:r>
+              <a:rPr sz="1150" b="0" i="0">
+                <a:solidFill>
+                  <a:srgbClr val="23426B"/>
+                </a:solidFill>
+                <a:latin typeface="Segoe UI"/>
+              </a:rPr>
+              <a:t>Đổi model không sửa backend</a:t>
             </a:r>
           </a:p>
         </p:txBody>
@@ -36227,13 +36307,13 @@
               </a:lnSpc>
             </a:pPr>
             <a:r>
-              <a:rPr sz="1250" b="0" i="0">
+              <a:rPr sz="1300" b="0" i="0">
                 <a:solidFill>
                   <a:srgbClr val="23426B"/>
                 </a:solidFill>
                 <a:latin typeface="Segoe UI"/>
               </a:rPr>
-              <a:t>Nếu người dùng CHƯA đồng ý → backend từ chối xử lý qua AI provider. Đây là rào chắn bảo vệ quyền riêng tư dữ liệu hội thoại.</a:t>
+              <a:t>Chưa đồng ý → backend từ chối gọi AI  ·  bảo vệ quyền riêng tư hội thoại.</a:t>
             </a:r>
           </a:p>
         </p:txBody>
@@ -36719,7 +36799,7 @@
         <p:spPr>
           <a:xfrm>
             <a:off x="777240" y="1645920"/>
-            <a:ext cx="10607040" cy="548640"/>
+            <a:ext cx="10607040" cy="457200"/>
           </a:xfrm>
           <a:prstGeom prst="rect">
             <a:avLst/>
@@ -36738,13 +36818,13 @@
               </a:lnSpc>
             </a:pPr>
             <a:r>
-              <a:rPr sz="1400" b="0" i="0">
+              <a:rPr sz="1400" b="1" i="0">
                 <a:solidFill>
                   <a:srgbClr val="23426B"/>
                 </a:solidFill>
                 <a:latin typeface="Segoe UI"/>
               </a:rPr>
-              <a:t>Tầng Event phát hành sự kiện hội thoại / tin nhắn / thành viên; Redis hỗ trợ hạ tầng chat &amp; fan-out.</a:t>
+              <a:t>Event layer phát sự kiện  ·  Redis fan-out đa instance</a:t>
             </a:r>
           </a:p>
         </p:txBody>
@@ -37467,11 +37547,11 @@
                 <a:spcPct val="105000"/>
               </a:lnSpc>
               <a:spcAft>
-                <a:spcPts val="500"/>
+                <a:spcPts val="600"/>
               </a:spcAft>
             </a:pPr>
             <a:r>
-              <a:rPr sz="1200" b="1">
+              <a:rPr sz="1250" b="1">
                 <a:solidFill>
                   <a:srgbClr val="2A4A93"/>
                 </a:solidFill>
@@ -37480,13 +37560,13 @@
               <a:t>▸  </a:t>
             </a:r>
             <a:r>
-              <a:rPr sz="1200">
+              <a:rPr sz="1250">
                 <a:solidFill>
                   <a:srgbClr val="23426B"/>
                 </a:solidFill>
                 <a:latin typeface="Segoe UI"/>
               </a:rPr>
-              <a:t>Tách rời người gửi và người nhận sự kiện (decoupling).</a:t>
+              <a:t>Decoupling người gửi ↔ người nhận</a:t>
             </a:r>
           </a:p>
           <a:p>
@@ -37495,11 +37575,11 @@
                 <a:spcPct val="105000"/>
               </a:lnSpc>
               <a:spcAft>
-                <a:spcPts val="500"/>
+                <a:spcPts val="600"/>
               </a:spcAft>
             </a:pPr>
             <a:r>
-              <a:rPr sz="1200" b="1">
+              <a:rPr sz="1250" b="1">
                 <a:solidFill>
                   <a:srgbClr val="2A4A93"/>
                 </a:solidFill>
@@ -37508,13 +37588,13 @@
               <a:t>▸  </a:t>
             </a:r>
             <a:r>
-              <a:rPr sz="1200">
+              <a:rPr sz="1250">
                 <a:solidFill>
                   <a:srgbClr val="23426B"/>
                 </a:solidFill>
                 <a:latin typeface="Segoe UI"/>
               </a:rPr>
-              <a:t>Hỗ trợ presence, đếm realtime, đồng bộ trạng thái giữa nhiều phiên/thiết bị.</a:t>
+              <a:t>Presence · đếm realtime · đồng bộ đa thiết bị</a:t>
             </a:r>
           </a:p>
         </p:txBody>
@@ -40185,8 +40265,8 @@
         </p:nvSpPr>
         <p:spPr>
           <a:xfrm>
-            <a:off x="777240" y="1664208"/>
-            <a:ext cx="10607040" cy="1005840"/>
+            <a:off x="777240" y="1691640"/>
+            <a:ext cx="10607040" cy="457200"/>
           </a:xfrm>
           <a:prstGeom prst="rect">
             <a:avLst/>
@@ -40201,17 +40281,17 @@
           <a:p>
             <a:pPr algn="l">
               <a:lnSpc>
-                <a:spcPct val="118000"/>
-              </a:lnSpc>
-            </a:pPr>
-            <a:r>
-              <a:rPr sz="1450" b="0" i="0">
+                <a:spcPct val="100000"/>
+              </a:lnSpc>
+            </a:pPr>
+            <a:r>
+              <a:rPr sz="1600" b="1" i="0">
                 <a:solidFill>
                   <a:srgbClr val="23426B"/>
                 </a:solidFill>
                 <a:latin typeface="Segoe UI"/>
               </a:rPr>
-              <a:t>Hệ thống mạng xã hội đa nền tảng, vận dụng kiến trúc phần mềm phân tầng, cơ sở dữ liệu lai, lập trình realtime và tối ưu hiệu năng. Tham khảo Instagram &amp; Zalo, chọn lọc các chức năng phù hợp người dùng Việt: Story, Reels, Newsfeed, Chat cá nhân/nhóm, Page, Notification.</a:t>
+              <a:t>MXH đa nền tảng  ·  tham khảo Instagram &amp; Zalo</a:t>
             </a:r>
           </a:p>
         </p:txBody>
@@ -40224,7 +40304,517 @@
         </p:nvSpPr>
         <p:spPr>
           <a:xfrm>
-            <a:off x="777240" y="2834640"/>
+            <a:off x="777240" y="2212848"/>
+            <a:ext cx="1627632" cy="384048"/>
+          </a:xfrm>
+          <a:prstGeom prst="roundRect">
+            <a:avLst>
+              <a:gd name="adj" fmla="val 50000"/>
+            </a:avLst>
+          </a:prstGeom>
+          <a:solidFill>
+            <a:srgbClr val="DCEAFB"/>
+          </a:solidFill>
+          <a:ln>
+            <a:noFill/>
+          </a:ln>
+          <a:effectLst/>
+        </p:spPr>
+        <p:style>
+          <a:lnRef idx="1">
+            <a:schemeClr val="accent1"/>
+          </a:lnRef>
+          <a:fillRef idx="3">
+            <a:schemeClr val="accent1"/>
+          </a:fillRef>
+          <a:effectRef idx="2">
+            <a:schemeClr val="accent1"/>
+          </a:effectRef>
+          <a:fontRef idx="minor">
+            <a:schemeClr val="lt1"/>
+          </a:fontRef>
+        </p:style>
+        <p:txBody>
+          <a:bodyPr rtlCol="0" anchor="ctr"/>
+          <a:lstStyle/>
+          <a:p>
+            <a:pPr algn="ctr"/>
+          </a:p>
+        </p:txBody>
+      </p:sp>
+      <p:sp>
+        <p:nvSpPr>
+          <p:cNvPr id="11" name="TextBox 10"/>
+          <p:cNvSpPr txBox="1"/>
+          <p:nvPr/>
+        </p:nvSpPr>
+        <p:spPr>
+          <a:xfrm>
+            <a:off x="777240" y="2200148"/>
+            <a:ext cx="1627632" cy="384048"/>
+          </a:xfrm>
+          <a:prstGeom prst="rect">
+            <a:avLst/>
+          </a:prstGeom>
+          <a:noFill/>
+        </p:spPr>
+        <p:txBody>
+          <a:bodyPr wrap="square" anchor="ctr" lIns="50800" rIns="50800" tIns="25400" bIns="25400">
+            <a:spAutoFit/>
+          </a:bodyPr>
+          <a:lstStyle/>
+          <a:p>
+            <a:pPr algn="ctr">
+              <a:lnSpc>
+                <a:spcPct val="100000"/>
+              </a:lnSpc>
+            </a:pPr>
+            <a:r>
+              <a:rPr sz="1150" b="1" i="0">
+                <a:solidFill>
+                  <a:srgbClr val="3E78D6"/>
+                </a:solidFill>
+                <a:latin typeface="Segoe UI Semibold"/>
+              </a:rPr>
+              <a:t>📸 Story</a:t>
+            </a:r>
+          </a:p>
+        </p:txBody>
+      </p:sp>
+      <p:sp>
+        <p:nvSpPr>
+          <p:cNvPr id="12" name="Rounded Rectangle 11"/>
+          <p:cNvSpPr/>
+          <p:nvPr/>
+        </p:nvSpPr>
+        <p:spPr>
+          <a:xfrm>
+            <a:off x="2514600" y="2212848"/>
+            <a:ext cx="1627632" cy="384048"/>
+          </a:xfrm>
+          <a:prstGeom prst="roundRect">
+            <a:avLst>
+              <a:gd name="adj" fmla="val 50000"/>
+            </a:avLst>
+          </a:prstGeom>
+          <a:solidFill>
+            <a:srgbClr val="DCEAFB"/>
+          </a:solidFill>
+          <a:ln>
+            <a:noFill/>
+          </a:ln>
+          <a:effectLst/>
+        </p:spPr>
+        <p:style>
+          <a:lnRef idx="1">
+            <a:schemeClr val="accent1"/>
+          </a:lnRef>
+          <a:fillRef idx="3">
+            <a:schemeClr val="accent1"/>
+          </a:fillRef>
+          <a:effectRef idx="2">
+            <a:schemeClr val="accent1"/>
+          </a:effectRef>
+          <a:fontRef idx="minor">
+            <a:schemeClr val="lt1"/>
+          </a:fontRef>
+        </p:style>
+        <p:txBody>
+          <a:bodyPr rtlCol="0" anchor="ctr"/>
+          <a:lstStyle/>
+          <a:p>
+            <a:pPr algn="ctr"/>
+          </a:p>
+        </p:txBody>
+      </p:sp>
+      <p:sp>
+        <p:nvSpPr>
+          <p:cNvPr id="13" name="TextBox 12"/>
+          <p:cNvSpPr txBox="1"/>
+          <p:nvPr/>
+        </p:nvSpPr>
+        <p:spPr>
+          <a:xfrm>
+            <a:off x="2514600" y="2200148"/>
+            <a:ext cx="1627632" cy="384048"/>
+          </a:xfrm>
+          <a:prstGeom prst="rect">
+            <a:avLst/>
+          </a:prstGeom>
+          <a:noFill/>
+        </p:spPr>
+        <p:txBody>
+          <a:bodyPr wrap="square" anchor="ctr" lIns="50800" rIns="50800" tIns="25400" bIns="25400">
+            <a:spAutoFit/>
+          </a:bodyPr>
+          <a:lstStyle/>
+          <a:p>
+            <a:pPr algn="ctr">
+              <a:lnSpc>
+                <a:spcPct val="100000"/>
+              </a:lnSpc>
+            </a:pPr>
+            <a:r>
+              <a:rPr sz="1150" b="1" i="0">
+                <a:solidFill>
+                  <a:srgbClr val="3E78D6"/>
+                </a:solidFill>
+                <a:latin typeface="Segoe UI Semibold"/>
+              </a:rPr>
+              <a:t>🎬 Reels</a:t>
+            </a:r>
+          </a:p>
+        </p:txBody>
+      </p:sp>
+      <p:sp>
+        <p:nvSpPr>
+          <p:cNvPr id="14" name="Rounded Rectangle 13"/>
+          <p:cNvSpPr/>
+          <p:nvPr/>
+        </p:nvSpPr>
+        <p:spPr>
+          <a:xfrm>
+            <a:off x="4251960" y="2212848"/>
+            <a:ext cx="1627632" cy="384048"/>
+          </a:xfrm>
+          <a:prstGeom prst="roundRect">
+            <a:avLst>
+              <a:gd name="adj" fmla="val 50000"/>
+            </a:avLst>
+          </a:prstGeom>
+          <a:solidFill>
+            <a:srgbClr val="DCEAFB"/>
+          </a:solidFill>
+          <a:ln>
+            <a:noFill/>
+          </a:ln>
+          <a:effectLst/>
+        </p:spPr>
+        <p:style>
+          <a:lnRef idx="1">
+            <a:schemeClr val="accent1"/>
+          </a:lnRef>
+          <a:fillRef idx="3">
+            <a:schemeClr val="accent1"/>
+          </a:fillRef>
+          <a:effectRef idx="2">
+            <a:schemeClr val="accent1"/>
+          </a:effectRef>
+          <a:fontRef idx="minor">
+            <a:schemeClr val="lt1"/>
+          </a:fontRef>
+        </p:style>
+        <p:txBody>
+          <a:bodyPr rtlCol="0" anchor="ctr"/>
+          <a:lstStyle/>
+          <a:p>
+            <a:pPr algn="ctr"/>
+          </a:p>
+        </p:txBody>
+      </p:sp>
+      <p:sp>
+        <p:nvSpPr>
+          <p:cNvPr id="15" name="TextBox 14"/>
+          <p:cNvSpPr txBox="1"/>
+          <p:nvPr/>
+        </p:nvSpPr>
+        <p:spPr>
+          <a:xfrm>
+            <a:off x="4251960" y="2200148"/>
+            <a:ext cx="1627632" cy="384048"/>
+          </a:xfrm>
+          <a:prstGeom prst="rect">
+            <a:avLst/>
+          </a:prstGeom>
+          <a:noFill/>
+        </p:spPr>
+        <p:txBody>
+          <a:bodyPr wrap="square" anchor="ctr" lIns="50800" rIns="50800" tIns="25400" bIns="25400">
+            <a:spAutoFit/>
+          </a:bodyPr>
+          <a:lstStyle/>
+          <a:p>
+            <a:pPr algn="ctr">
+              <a:lnSpc>
+                <a:spcPct val="100000"/>
+              </a:lnSpc>
+            </a:pPr>
+            <a:r>
+              <a:rPr sz="1150" b="1" i="0">
+                <a:solidFill>
+                  <a:srgbClr val="3E78D6"/>
+                </a:solidFill>
+                <a:latin typeface="Segoe UI Semibold"/>
+              </a:rPr>
+              <a:t>📰 Newsfeed</a:t>
+            </a:r>
+          </a:p>
+        </p:txBody>
+      </p:sp>
+      <p:sp>
+        <p:nvSpPr>
+          <p:cNvPr id="16" name="Rounded Rectangle 15"/>
+          <p:cNvSpPr/>
+          <p:nvPr/>
+        </p:nvSpPr>
+        <p:spPr>
+          <a:xfrm>
+            <a:off x="5989320" y="2212848"/>
+            <a:ext cx="1627632" cy="384048"/>
+          </a:xfrm>
+          <a:prstGeom prst="roundRect">
+            <a:avLst>
+              <a:gd name="adj" fmla="val 50000"/>
+            </a:avLst>
+          </a:prstGeom>
+          <a:solidFill>
+            <a:srgbClr val="DCEAFB"/>
+          </a:solidFill>
+          <a:ln>
+            <a:noFill/>
+          </a:ln>
+          <a:effectLst/>
+        </p:spPr>
+        <p:style>
+          <a:lnRef idx="1">
+            <a:schemeClr val="accent1"/>
+          </a:lnRef>
+          <a:fillRef idx="3">
+            <a:schemeClr val="accent1"/>
+          </a:fillRef>
+          <a:effectRef idx="2">
+            <a:schemeClr val="accent1"/>
+          </a:effectRef>
+          <a:fontRef idx="minor">
+            <a:schemeClr val="lt1"/>
+          </a:fontRef>
+        </p:style>
+        <p:txBody>
+          <a:bodyPr rtlCol="0" anchor="ctr"/>
+          <a:lstStyle/>
+          <a:p>
+            <a:pPr algn="ctr"/>
+          </a:p>
+        </p:txBody>
+      </p:sp>
+      <p:sp>
+        <p:nvSpPr>
+          <p:cNvPr id="17" name="TextBox 16"/>
+          <p:cNvSpPr txBox="1"/>
+          <p:nvPr/>
+        </p:nvSpPr>
+        <p:spPr>
+          <a:xfrm>
+            <a:off x="5989320" y="2200148"/>
+            <a:ext cx="1627632" cy="384048"/>
+          </a:xfrm>
+          <a:prstGeom prst="rect">
+            <a:avLst/>
+          </a:prstGeom>
+          <a:noFill/>
+        </p:spPr>
+        <p:txBody>
+          <a:bodyPr wrap="square" anchor="ctr" lIns="50800" rIns="50800" tIns="25400" bIns="25400">
+            <a:spAutoFit/>
+          </a:bodyPr>
+          <a:lstStyle/>
+          <a:p>
+            <a:pPr algn="ctr">
+              <a:lnSpc>
+                <a:spcPct val="100000"/>
+              </a:lnSpc>
+            </a:pPr>
+            <a:r>
+              <a:rPr sz="1150" b="1" i="0">
+                <a:solidFill>
+                  <a:srgbClr val="3E78D6"/>
+                </a:solidFill>
+                <a:latin typeface="Segoe UI Semibold"/>
+              </a:rPr>
+              <a:t>💬 Chat</a:t>
+            </a:r>
+          </a:p>
+        </p:txBody>
+      </p:sp>
+      <p:sp>
+        <p:nvSpPr>
+          <p:cNvPr id="18" name="Rounded Rectangle 17"/>
+          <p:cNvSpPr/>
+          <p:nvPr/>
+        </p:nvSpPr>
+        <p:spPr>
+          <a:xfrm>
+            <a:off x="7726680" y="2212848"/>
+            <a:ext cx="1627632" cy="384048"/>
+          </a:xfrm>
+          <a:prstGeom prst="roundRect">
+            <a:avLst>
+              <a:gd name="adj" fmla="val 50000"/>
+            </a:avLst>
+          </a:prstGeom>
+          <a:solidFill>
+            <a:srgbClr val="DCEAFB"/>
+          </a:solidFill>
+          <a:ln>
+            <a:noFill/>
+          </a:ln>
+          <a:effectLst/>
+        </p:spPr>
+        <p:style>
+          <a:lnRef idx="1">
+            <a:schemeClr val="accent1"/>
+          </a:lnRef>
+          <a:fillRef idx="3">
+            <a:schemeClr val="accent1"/>
+          </a:fillRef>
+          <a:effectRef idx="2">
+            <a:schemeClr val="accent1"/>
+          </a:effectRef>
+          <a:fontRef idx="minor">
+            <a:schemeClr val="lt1"/>
+          </a:fontRef>
+        </p:style>
+        <p:txBody>
+          <a:bodyPr rtlCol="0" anchor="ctr"/>
+          <a:lstStyle/>
+          <a:p>
+            <a:pPr algn="ctr"/>
+          </a:p>
+        </p:txBody>
+      </p:sp>
+      <p:sp>
+        <p:nvSpPr>
+          <p:cNvPr id="19" name="TextBox 18"/>
+          <p:cNvSpPr txBox="1"/>
+          <p:nvPr/>
+        </p:nvSpPr>
+        <p:spPr>
+          <a:xfrm>
+            <a:off x="7726680" y="2200148"/>
+            <a:ext cx="1627632" cy="384048"/>
+          </a:xfrm>
+          <a:prstGeom prst="rect">
+            <a:avLst/>
+          </a:prstGeom>
+          <a:noFill/>
+        </p:spPr>
+        <p:txBody>
+          <a:bodyPr wrap="square" anchor="ctr" lIns="50800" rIns="50800" tIns="25400" bIns="25400">
+            <a:spAutoFit/>
+          </a:bodyPr>
+          <a:lstStyle/>
+          <a:p>
+            <a:pPr algn="ctr">
+              <a:lnSpc>
+                <a:spcPct val="100000"/>
+              </a:lnSpc>
+            </a:pPr>
+            <a:r>
+              <a:rPr sz="1150" b="1" i="0">
+                <a:solidFill>
+                  <a:srgbClr val="3E78D6"/>
+                </a:solidFill>
+                <a:latin typeface="Segoe UI Semibold"/>
+              </a:rPr>
+              <a:t>📄 Page</a:t>
+            </a:r>
+          </a:p>
+        </p:txBody>
+      </p:sp>
+      <p:sp>
+        <p:nvSpPr>
+          <p:cNvPr id="20" name="Rounded Rectangle 19"/>
+          <p:cNvSpPr/>
+          <p:nvPr/>
+        </p:nvSpPr>
+        <p:spPr>
+          <a:xfrm>
+            <a:off x="9464040" y="2212848"/>
+            <a:ext cx="1627632" cy="384048"/>
+          </a:xfrm>
+          <a:prstGeom prst="roundRect">
+            <a:avLst>
+              <a:gd name="adj" fmla="val 50000"/>
+            </a:avLst>
+          </a:prstGeom>
+          <a:solidFill>
+            <a:srgbClr val="DCEAFB"/>
+          </a:solidFill>
+          <a:ln>
+            <a:noFill/>
+          </a:ln>
+          <a:effectLst/>
+        </p:spPr>
+        <p:style>
+          <a:lnRef idx="1">
+            <a:schemeClr val="accent1"/>
+          </a:lnRef>
+          <a:fillRef idx="3">
+            <a:schemeClr val="accent1"/>
+          </a:fillRef>
+          <a:effectRef idx="2">
+            <a:schemeClr val="accent1"/>
+          </a:effectRef>
+          <a:fontRef idx="minor">
+            <a:schemeClr val="lt1"/>
+          </a:fontRef>
+        </p:style>
+        <p:txBody>
+          <a:bodyPr rtlCol="0" anchor="ctr"/>
+          <a:lstStyle/>
+          <a:p>
+            <a:pPr algn="ctr"/>
+          </a:p>
+        </p:txBody>
+      </p:sp>
+      <p:sp>
+        <p:nvSpPr>
+          <p:cNvPr id="21" name="TextBox 20"/>
+          <p:cNvSpPr txBox="1"/>
+          <p:nvPr/>
+        </p:nvSpPr>
+        <p:spPr>
+          <a:xfrm>
+            <a:off x="9464040" y="2200148"/>
+            <a:ext cx="1627632" cy="384048"/>
+          </a:xfrm>
+          <a:prstGeom prst="rect">
+            <a:avLst/>
+          </a:prstGeom>
+          <a:noFill/>
+        </p:spPr>
+        <p:txBody>
+          <a:bodyPr wrap="square" anchor="ctr" lIns="50800" rIns="50800" tIns="25400" bIns="25400">
+            <a:spAutoFit/>
+          </a:bodyPr>
+          <a:lstStyle/>
+          <a:p>
+            <a:pPr algn="ctr">
+              <a:lnSpc>
+                <a:spcPct val="100000"/>
+              </a:lnSpc>
+            </a:pPr>
+            <a:r>
+              <a:rPr sz="1150" b="1" i="0">
+                <a:solidFill>
+                  <a:srgbClr val="3E78D6"/>
+                </a:solidFill>
+                <a:latin typeface="Segoe UI Semibold"/>
+              </a:rPr>
+              <a:t>🔔 Notification</a:t>
+            </a:r>
+          </a:p>
+        </p:txBody>
+      </p:sp>
+      <p:sp>
+        <p:nvSpPr>
+          <p:cNvPr id="22" name="Rounded Rectangle 21"/>
+          <p:cNvSpPr/>
+          <p:nvPr/>
+        </p:nvSpPr>
+        <p:spPr>
+          <a:xfrm>
+            <a:off x="777240" y="3063240"/>
             <a:ext cx="3520440" cy="2331720"/>
           </a:xfrm>
           <a:prstGeom prst="roundRect">
@@ -40272,13 +40862,13 @@
       </p:sp>
       <p:sp>
         <p:nvSpPr>
-          <p:cNvPr id="11" name="Rounded Rectangle 10"/>
+          <p:cNvPr id="23" name="Rounded Rectangle 22"/>
           <p:cNvSpPr/>
           <p:nvPr/>
         </p:nvSpPr>
         <p:spPr>
           <a:xfrm>
-            <a:off x="777240" y="2834640"/>
+            <a:off x="777240" y="3063240"/>
             <a:ext cx="3520440" cy="109728"/>
           </a:xfrm>
           <a:prstGeom prst="roundRect">
@@ -40326,13 +40916,13 @@
       </p:sp>
       <p:sp>
         <p:nvSpPr>
-          <p:cNvPr id="12" name="Rounded Rectangle 11"/>
+          <p:cNvPr id="24" name="Rounded Rectangle 23"/>
           <p:cNvSpPr/>
           <p:nvPr/>
         </p:nvSpPr>
         <p:spPr>
           <a:xfrm>
-            <a:off x="978408" y="3090672"/>
+            <a:off x="978408" y="3319272"/>
             <a:ext cx="603504" cy="603504"/>
           </a:xfrm>
           <a:prstGeom prst="roundRect">
@@ -40386,13 +40976,13 @@
       </p:sp>
       <p:sp>
         <p:nvSpPr>
-          <p:cNvPr id="13" name="TextBox 12"/>
+          <p:cNvPr id="25" name="TextBox 24"/>
           <p:cNvSpPr txBox="1"/>
           <p:nvPr/>
         </p:nvSpPr>
         <p:spPr>
           <a:xfrm>
-            <a:off x="978408" y="3072384"/>
+            <a:off x="978408" y="3300984"/>
             <a:ext cx="603504" cy="603504"/>
           </a:xfrm>
           <a:prstGeom prst="rect">
@@ -40425,13 +41015,13 @@
       </p:sp>
       <p:sp>
         <p:nvSpPr>
-          <p:cNvPr id="14" name="TextBox 13"/>
+          <p:cNvPr id="26" name="TextBox 25"/>
           <p:cNvSpPr txBox="1"/>
           <p:nvPr/>
         </p:nvSpPr>
         <p:spPr>
           <a:xfrm>
-            <a:off x="960120" y="3767328"/>
+            <a:off x="960120" y="3995928"/>
             <a:ext cx="3154680" cy="365760"/>
           </a:xfrm>
           <a:prstGeom prst="rect">
@@ -40451,7 +41041,7 @@
               </a:lnSpc>
             </a:pPr>
             <a:r>
-              <a:rPr sz="1700" b="1" i="0">
+              <a:rPr sz="1900" b="1" i="0">
                 <a:solidFill>
                   <a:srgbClr val="0B2545"/>
                 </a:solidFill>
@@ -40464,13 +41054,13 @@
       </p:sp>
       <p:sp>
         <p:nvSpPr>
-          <p:cNvPr id="15" name="TextBox 14"/>
+          <p:cNvPr id="27" name="TextBox 26"/>
           <p:cNvSpPr txBox="1"/>
           <p:nvPr/>
         </p:nvSpPr>
         <p:spPr>
           <a:xfrm>
-            <a:off x="960120" y="4133088"/>
+            <a:off x="960120" y="4361688"/>
             <a:ext cx="3154680" cy="960120"/>
           </a:xfrm>
           <a:prstGeom prst="rect">
@@ -40490,26 +41080,42 @@
               </a:lnSpc>
             </a:pPr>
             <a:r>
-              <a:rPr sz="1250" b="0" i="0">
+              <a:rPr sz="1450" b="0" i="0">
                 <a:solidFill>
                   <a:srgbClr val="23426B"/>
                 </a:solidFill>
                 <a:latin typeface="Segoe UI"/>
               </a:rPr>
-              <a:t>Spring Boot 3.5 trên Java 21 — vừa là REST API Server vừa là WebSocket Server phục vụ các chức năng realtime.</a:t>
-            </a:r>
-          </a:p>
-        </p:txBody>
-      </p:sp>
-      <p:sp>
-        <p:nvSpPr>
-          <p:cNvPr id="16" name="Rounded Rectangle 15"/>
+              <a:t>Spring Boot 3.5 · Java 21</a:t>
+            </a:r>
+          </a:p>
+          <a:p>
+            <a:pPr algn="l">
+              <a:lnSpc>
+                <a:spcPct val="105000"/>
+              </a:lnSpc>
+            </a:pPr>
+            <a:r>
+              <a:rPr sz="1450" b="0" i="0">
+                <a:solidFill>
+                  <a:srgbClr val="23426B"/>
+                </a:solidFill>
+                <a:latin typeface="Segoe UI"/>
+              </a:rPr>
+              <a:t>REST API + WebSocket</a:t>
+            </a:r>
+          </a:p>
+        </p:txBody>
+      </p:sp>
+      <p:sp>
+        <p:nvSpPr>
+          <p:cNvPr id="28" name="Rounded Rectangle 27"/>
           <p:cNvSpPr/>
           <p:nvPr/>
         </p:nvSpPr>
         <p:spPr>
           <a:xfrm>
-            <a:off x="4599432" y="2834640"/>
+            <a:off x="4599432" y="3063240"/>
             <a:ext cx="3520440" cy="2331720"/>
           </a:xfrm>
           <a:prstGeom prst="roundRect">
@@ -40557,13 +41163,13 @@
       </p:sp>
       <p:sp>
         <p:nvSpPr>
-          <p:cNvPr id="17" name="Rounded Rectangle 16"/>
+          <p:cNvPr id="29" name="Rounded Rectangle 28"/>
           <p:cNvSpPr/>
           <p:nvPr/>
         </p:nvSpPr>
         <p:spPr>
           <a:xfrm>
-            <a:off x="4599432" y="2834640"/>
+            <a:off x="4599432" y="3063240"/>
             <a:ext cx="3520440" cy="109728"/>
           </a:xfrm>
           <a:prstGeom prst="roundRect">
@@ -40611,13 +41217,13 @@
       </p:sp>
       <p:sp>
         <p:nvSpPr>
-          <p:cNvPr id="18" name="Rounded Rectangle 17"/>
+          <p:cNvPr id="30" name="Rounded Rectangle 29"/>
           <p:cNvSpPr/>
           <p:nvPr/>
         </p:nvSpPr>
         <p:spPr>
           <a:xfrm>
-            <a:off x="4800600" y="3090672"/>
+            <a:off x="4800600" y="3319272"/>
             <a:ext cx="603504" cy="603504"/>
           </a:xfrm>
           <a:prstGeom prst="roundRect">
@@ -40671,13 +41277,13 @@
       </p:sp>
       <p:sp>
         <p:nvSpPr>
-          <p:cNvPr id="19" name="TextBox 18"/>
+          <p:cNvPr id="31" name="TextBox 30"/>
           <p:cNvSpPr txBox="1"/>
           <p:nvPr/>
         </p:nvSpPr>
         <p:spPr>
           <a:xfrm>
-            <a:off x="4800600" y="3072384"/>
+            <a:off x="4800600" y="3300984"/>
             <a:ext cx="603504" cy="603504"/>
           </a:xfrm>
           <a:prstGeom prst="rect">
@@ -40710,13 +41316,13 @@
       </p:sp>
       <p:sp>
         <p:nvSpPr>
-          <p:cNvPr id="20" name="TextBox 19"/>
+          <p:cNvPr id="32" name="TextBox 31"/>
           <p:cNvSpPr txBox="1"/>
           <p:nvPr/>
         </p:nvSpPr>
         <p:spPr>
           <a:xfrm>
-            <a:off x="4782312" y="3767328"/>
+            <a:off x="4782312" y="3995928"/>
             <a:ext cx="3154680" cy="365760"/>
           </a:xfrm>
           <a:prstGeom prst="rect">
@@ -40736,26 +41342,26 @@
               </a:lnSpc>
             </a:pPr>
             <a:r>
-              <a:rPr sz="1700" b="1" i="0">
+              <a:rPr sz="1900" b="1" i="0">
                 <a:solidFill>
                   <a:srgbClr val="0B2545"/>
                 </a:solidFill>
                 <a:latin typeface="Segoe UI Semibold"/>
               </a:rPr>
-              <a:t>Frontend Web</a:t>
-            </a:r>
-          </a:p>
-        </p:txBody>
-      </p:sp>
-      <p:sp>
-        <p:nvSpPr>
-          <p:cNvPr id="21" name="TextBox 20"/>
+              <a:t>Web</a:t>
+            </a:r>
+          </a:p>
+        </p:txBody>
+      </p:sp>
+      <p:sp>
+        <p:nvSpPr>
+          <p:cNvPr id="33" name="TextBox 32"/>
           <p:cNvSpPr txBox="1"/>
           <p:nvPr/>
         </p:nvSpPr>
         <p:spPr>
           <a:xfrm>
-            <a:off x="4782312" y="4133088"/>
+            <a:off x="4782312" y="4361688"/>
             <a:ext cx="3154680" cy="960120"/>
           </a:xfrm>
           <a:prstGeom prst="rect">
@@ -40775,26 +41381,42 @@
               </a:lnSpc>
             </a:pPr>
             <a:r>
-              <a:rPr sz="1250" b="0" i="0">
+              <a:rPr sz="1450" b="0" i="0">
                 <a:solidFill>
                   <a:srgbClr val="23426B"/>
                 </a:solidFill>
                 <a:latin typeface="Segoe UI"/>
               </a:rPr>
-              <a:t>SPA bằng React 19, Vite 7, TailwindCSS 4 &amp; Ant Design 5 — tối ưu cho trình duyệt máy tính &amp; máy tính bảng.</a:t>
-            </a:r>
-          </a:p>
-        </p:txBody>
-      </p:sp>
-      <p:sp>
-        <p:nvSpPr>
-          <p:cNvPr id="22" name="Rounded Rectangle 21"/>
+              <a:t>React 19 · Vite 7</a:t>
+            </a:r>
+          </a:p>
+          <a:p>
+            <a:pPr algn="l">
+              <a:lnSpc>
+                <a:spcPct val="105000"/>
+              </a:lnSpc>
+            </a:pPr>
+            <a:r>
+              <a:rPr sz="1450" b="0" i="0">
+                <a:solidFill>
+                  <a:srgbClr val="23426B"/>
+                </a:solidFill>
+                <a:latin typeface="Segoe UI"/>
+              </a:rPr>
+              <a:t>Tailwind · Ant Design</a:t>
+            </a:r>
+          </a:p>
+        </p:txBody>
+      </p:sp>
+      <p:sp>
+        <p:nvSpPr>
+          <p:cNvPr id="34" name="Rounded Rectangle 33"/>
           <p:cNvSpPr/>
           <p:nvPr/>
         </p:nvSpPr>
         <p:spPr>
           <a:xfrm>
-            <a:off x="8421624" y="2834640"/>
+            <a:off x="8421624" y="3063240"/>
             <a:ext cx="3520440" cy="2331720"/>
           </a:xfrm>
           <a:prstGeom prst="roundRect">
@@ -40842,13 +41464,13 @@
       </p:sp>
       <p:sp>
         <p:nvSpPr>
-          <p:cNvPr id="23" name="Rounded Rectangle 22"/>
+          <p:cNvPr id="35" name="Rounded Rectangle 34"/>
           <p:cNvSpPr/>
           <p:nvPr/>
         </p:nvSpPr>
         <p:spPr>
           <a:xfrm>
-            <a:off x="8421624" y="2834640"/>
+            <a:off x="8421624" y="3063240"/>
             <a:ext cx="3520440" cy="109728"/>
           </a:xfrm>
           <a:prstGeom prst="roundRect">
@@ -40896,13 +41518,13 @@
       </p:sp>
       <p:sp>
         <p:nvSpPr>
-          <p:cNvPr id="24" name="Rounded Rectangle 23"/>
+          <p:cNvPr id="36" name="Rounded Rectangle 35"/>
           <p:cNvSpPr/>
           <p:nvPr/>
         </p:nvSpPr>
         <p:spPr>
           <a:xfrm>
-            <a:off x="8622792" y="3090672"/>
+            <a:off x="8622792" y="3319272"/>
             <a:ext cx="603504" cy="603504"/>
           </a:xfrm>
           <a:prstGeom prst="roundRect">
@@ -40956,13 +41578,13 @@
       </p:sp>
       <p:sp>
         <p:nvSpPr>
-          <p:cNvPr id="25" name="TextBox 24"/>
+          <p:cNvPr id="37" name="TextBox 36"/>
           <p:cNvSpPr txBox="1"/>
           <p:nvPr/>
         </p:nvSpPr>
         <p:spPr>
           <a:xfrm>
-            <a:off x="8622792" y="3072384"/>
+            <a:off x="8622792" y="3300984"/>
             <a:ext cx="603504" cy="603504"/>
           </a:xfrm>
           <a:prstGeom prst="rect">
@@ -40995,13 +41617,13 @@
       </p:sp>
       <p:sp>
         <p:nvSpPr>
-          <p:cNvPr id="26" name="TextBox 25"/>
+          <p:cNvPr id="38" name="TextBox 37"/>
           <p:cNvSpPr txBox="1"/>
           <p:nvPr/>
         </p:nvSpPr>
         <p:spPr>
           <a:xfrm>
-            <a:off x="8604504" y="3767328"/>
+            <a:off x="8604504" y="3995928"/>
             <a:ext cx="3154680" cy="365760"/>
           </a:xfrm>
           <a:prstGeom prst="rect">
@@ -41021,26 +41643,26 @@
               </a:lnSpc>
             </a:pPr>
             <a:r>
-              <a:rPr sz="1700" b="1" i="0">
+              <a:rPr sz="1900" b="1" i="0">
                 <a:solidFill>
                   <a:srgbClr val="0B2545"/>
                 </a:solidFill>
                 <a:latin typeface="Segoe UI Semibold"/>
               </a:rPr>
-              <a:t>Frontend Mobile</a:t>
-            </a:r>
-          </a:p>
-        </p:txBody>
-      </p:sp>
-      <p:sp>
-        <p:nvSpPr>
-          <p:cNvPr id="27" name="TextBox 26"/>
+              <a:t>Mobile</a:t>
+            </a:r>
+          </a:p>
+        </p:txBody>
+      </p:sp>
+      <p:sp>
+        <p:nvSpPr>
+          <p:cNvPr id="39" name="TextBox 38"/>
           <p:cNvSpPr txBox="1"/>
           <p:nvPr/>
         </p:nvSpPr>
         <p:spPr>
           <a:xfrm>
-            <a:off x="8604504" y="4133088"/>
+            <a:off x="8604504" y="4361688"/>
             <a:ext cx="3154680" cy="960120"/>
           </a:xfrm>
           <a:prstGeom prst="rect">
@@ -41060,73 +41682,43 @@
               </a:lnSpc>
             </a:pPr>
             <a:r>
-              <a:rPr sz="1250" b="0" i="0">
+              <a:rPr sz="1450" b="0" i="0">
                 <a:solidFill>
                   <a:srgbClr val="23426B"/>
                 </a:solidFill>
                 <a:latin typeface="Segoe UI"/>
               </a:rPr>
-              <a:t>Ứng dụng di động React Native 0.81 + Expo SDK 54 — hỗ trợ đồng thời Android và iOS.</a:t>
-            </a:r>
-          </a:p>
-        </p:txBody>
-      </p:sp>
-      <p:sp>
-        <p:nvSpPr>
-          <p:cNvPr id="28" name="Rounded Rectangle 27"/>
-          <p:cNvSpPr/>
-          <p:nvPr/>
-        </p:nvSpPr>
-        <p:spPr>
-          <a:xfrm>
-            <a:off x="777240" y="5440680"/>
-            <a:ext cx="10607040" cy="777240"/>
-          </a:xfrm>
-          <a:prstGeom prst="roundRect">
-            <a:avLst>
-              <a:gd name="adj" fmla="val 12000"/>
-            </a:avLst>
-          </a:prstGeom>
-          <a:solidFill>
-            <a:srgbClr val="DCEAFB"/>
-          </a:solidFill>
-          <a:ln>
-            <a:noFill/>
-          </a:ln>
-          <a:effectLst/>
-        </p:spPr>
-        <p:style>
-          <a:lnRef idx="1">
-            <a:schemeClr val="accent1"/>
-          </a:lnRef>
-          <a:fillRef idx="3">
-            <a:schemeClr val="accent1"/>
-          </a:fillRef>
-          <a:effectRef idx="2">
-            <a:schemeClr val="accent1"/>
-          </a:effectRef>
-          <a:fontRef idx="minor">
-            <a:schemeClr val="lt1"/>
-          </a:fontRef>
-        </p:style>
-        <p:txBody>
-          <a:bodyPr rtlCol="0" anchor="ctr"/>
-          <a:lstStyle/>
-          <a:p>
-            <a:pPr algn="ctr"/>
-          </a:p>
-        </p:txBody>
-      </p:sp>
-      <p:sp>
-        <p:nvSpPr>
-          <p:cNvPr id="29" name="TextBox 28"/>
+              <a:t>React Native · Expo 54</a:t>
+            </a:r>
+          </a:p>
+          <a:p>
+            <a:pPr algn="l">
+              <a:lnSpc>
+                <a:spcPct val="105000"/>
+              </a:lnSpc>
+            </a:pPr>
+            <a:r>
+              <a:rPr sz="1450" b="0" i="0">
+                <a:solidFill>
+                  <a:srgbClr val="23426B"/>
+                </a:solidFill>
+                <a:latin typeface="Segoe UI"/>
+              </a:rPr>
+              <a:t>Android + iOS</a:t>
+            </a:r>
+          </a:p>
+        </p:txBody>
+      </p:sp>
+      <p:sp>
+        <p:nvSpPr>
+          <p:cNvPr id="40" name="TextBox 39"/>
           <p:cNvSpPr txBox="1"/>
           <p:nvPr/>
         </p:nvSpPr>
         <p:spPr>
           <a:xfrm>
-            <a:off x="960120" y="5486400"/>
-            <a:ext cx="10332720" cy="365760"/>
+            <a:off x="502920" y="6419088"/>
+            <a:ext cx="5486400" cy="320040"/>
           </a:xfrm>
           <a:prstGeom prst="rect">
             <a:avLst/>
@@ -41145,90 +41737,12 @@
               </a:lnSpc>
             </a:pPr>
             <a:r>
-              <a:rPr sz="1250" b="1" i="0">
-                <a:solidFill>
-                  <a:srgbClr val="2E93AE"/>
-                </a:solidFill>
-                <a:latin typeface="Segoe UI Semibold"/>
-              </a:rPr>
-              <a:t>💡  Ý nghĩa tên gọi</a:t>
-            </a:r>
-          </a:p>
-        </p:txBody>
-      </p:sp>
-      <p:sp>
-        <p:nvSpPr>
-          <p:cNvPr id="30" name="TextBox 29"/>
-          <p:cNvSpPr txBox="1"/>
-          <p:nvPr/>
-        </p:nvSpPr>
-        <p:spPr>
-          <a:xfrm>
-            <a:off x="960120" y="5833872"/>
-            <a:ext cx="10332720" cy="365760"/>
-          </a:xfrm>
-          <a:prstGeom prst="rect">
-            <a:avLst/>
-          </a:prstGeom>
-          <a:noFill/>
-        </p:spPr>
-        <p:txBody>
-          <a:bodyPr wrap="square" anchor="ctr" lIns="50800" rIns="50800" tIns="25400" bIns="25400">
-            <a:spAutoFit/>
-          </a:bodyPr>
-          <a:lstStyle/>
-          <a:p>
-            <a:pPr algn="l">
-              <a:lnSpc>
-                <a:spcPct val="100000"/>
-              </a:lnSpc>
-            </a:pPr>
-            <a:r>
-              <a:rPr sz="1150" b="0" i="0">
+              <a:rPr sz="950" b="0" i="0">
                 <a:solidFill>
                   <a:srgbClr val="6E7F9B"/>
                 </a:solidFill>
                 <a:latin typeface="Segoe UI"/>
               </a:rPr>
-              <a:t>“Wisdom Social” — không gian mạng xã hội tích cực để chia sẻ kiến thức, kinh nghiệm, khoảnh khắc đời sống và kết nối qua nội dung mang giá trị cộng đồng.</a:t>
-            </a:r>
-          </a:p>
-        </p:txBody>
-      </p:sp>
-      <p:sp>
-        <p:nvSpPr>
-          <p:cNvPr id="31" name="TextBox 30"/>
-          <p:cNvSpPr txBox="1"/>
-          <p:nvPr/>
-        </p:nvSpPr>
-        <p:spPr>
-          <a:xfrm>
-            <a:off x="502920" y="6419088"/>
-            <a:ext cx="5486400" cy="320040"/>
-          </a:xfrm>
-          <a:prstGeom prst="rect">
-            <a:avLst/>
-          </a:prstGeom>
-          <a:noFill/>
-        </p:spPr>
-        <p:txBody>
-          <a:bodyPr wrap="square" anchor="t" lIns="50800" rIns="50800" tIns="25400" bIns="25400">
-            <a:spAutoFit/>
-          </a:bodyPr>
-          <a:lstStyle/>
-          <a:p>
-            <a:pPr algn="l">
-              <a:lnSpc>
-                <a:spcPct val="100000"/>
-              </a:lnSpc>
-            </a:pPr>
-            <a:r>
-              <a:rPr sz="950" b="0" i="0">
-                <a:solidFill>
-                  <a:srgbClr val="6E7F9B"/>
-                </a:solidFill>
-                <a:latin typeface="Segoe UI"/>
-              </a:rPr>
               <a:t>Wisdom Social  •  Social Networking Platform</a:t>
             </a:r>
           </a:p>
@@ -41236,7 +41750,7 @@
       </p:sp>
       <p:sp>
         <p:nvSpPr>
-          <p:cNvPr id="32" name="Rounded Rectangle 31"/>
+          <p:cNvPr id="41" name="Rounded Rectangle 40"/>
           <p:cNvSpPr/>
           <p:nvPr/>
         </p:nvSpPr>
@@ -41290,7 +41804,7 @@
       </p:sp>
       <p:sp>
         <p:nvSpPr>
-          <p:cNvPr id="33" name="TextBox 32"/>
+          <p:cNvPr id="42" name="TextBox 41"/>
           <p:cNvSpPr txBox="1"/>
           <p:nvPr/>
         </p:nvSpPr>
@@ -43931,7 +44445,7 @@
                 </a:solidFill>
                 <a:latin typeface="Segoe UI"/>
               </a:rPr>
-              <a:t>Spring Security xác thực JWT do Cognito phát hành cho mỗi request, không lưu phiên server.</a:t>
+              <a:t>JWT mỗi request · không lưu phiên</a:t>
             </a:r>
           </a:p>
         </p:txBody>
@@ -44216,7 +44730,7 @@
                 </a:solidFill>
                 <a:latin typeface="Segoe UI"/>
               </a:rPr>
-              <a:t>Web: secure cookies. Mobile: Expo Secure Store. Tự refresh token khi hết hạn.</a:t>
+              <a:t>Cookie (web) · Secure Store (mobile)</a:t>
             </a:r>
           </a:p>
         </p:txBody>
@@ -44501,7 +45015,7 @@
                 </a:solidFill>
                 <a:latin typeface="Segoe UI"/>
               </a:rPr>
-              <a:t>Bắt buộc người dùng đồng ý trước khi dữ liệu hội thoại được xử lý qua AI provider.</a:t>
+              <a:t>Đồng ý trước khi xử lý AI</a:t>
             </a:r>
           </a:p>
         </p:txBody>
@@ -44786,7 +45300,7 @@
                 </a:solidFill>
                 <a:latin typeface="Segoe UI"/>
               </a:rPr>
-              <a:t>Cấu hình CORS; web proxy /api &amp; /ws qua Vite; tách credentials theo client.</a:t>
+              <a:t>CORS · Vite proxy · tách credentials</a:t>
             </a:r>
           </a:p>
         </p:txBody>
@@ -45071,7 +45585,7 @@
                 </a:solidFill>
                 <a:latin typeface="Segoe UI"/>
               </a:rPr>
-              <a:t>Profile privacy, chặn người dùng, hội thoại read-only khi bị chặn.</a:t>
+              <a:t>Privacy · chặn · read-only</a:t>
             </a:r>
           </a:p>
         </p:txBody>
@@ -45356,7 +45870,7 @@
                 </a:solidFill>
                 <a:latin typeface="Segoe UI"/>
               </a:rPr>
-              <a:t>Vai trò thành viên trang, duyệt bài &amp; yêu cầu tham gia có kiểm soát.</a:t>
+              <a:t>Vai trò · duyệt bài kiểm soát</a:t>
             </a:r>
           </a:p>
         </p:txBody>
@@ -48812,7 +49326,7 @@
                 </a:solidFill>
                 <a:latin typeface="Segoe UI"/>
               </a:rPr>
-              <a:t>Sinh tài liệu API tự động từ Spring controllers.</a:t>
+              <a:t>Tài liệu API tự động</a:t>
             </a:r>
           </a:p>
         </p:txBody>
@@ -49097,7 +49611,7 @@
                 </a:solidFill>
                 <a:latin typeface="Segoe UI"/>
               </a:rPr>
-              <a:t>Đưa secrets ra khỏi config &amp; cung cấp .env.example.</a:t>
+              <a:t>Tách secrets · .env.example</a:t>
             </a:r>
           </a:p>
         </p:txBody>
@@ -49343,7 +49857,7 @@
                 </a:solidFill>
                 <a:latin typeface="Segoe UI Semibold"/>
               </a:rPr>
-              <a:t>Docker Compose đầy đủ</a:t>
+              <a:t>Docker Compose</a:t>
             </a:r>
           </a:p>
         </p:txBody>
@@ -49382,7 +49896,7 @@
                 </a:solidFill>
                 <a:latin typeface="Segoe UI"/>
               </a:rPr>
-              <a:t>Profiles cho MariaDB, MongoDB, Redis &amp; backend.</a:t>
+              <a:t>Đầy đủ các service</a:t>
             </a:r>
           </a:p>
         </p:txBody>
@@ -49667,7 +50181,7 @@
                 </a:solidFill>
                 <a:latin typeface="Segoe UI"/>
               </a:rPr>
-              <a:t>Workflow test backend, lint frontend, build TypeScript.</a:t>
+              <a:t>Test · Lint · Build tự động</a:t>
             </a:r>
           </a:p>
         </p:txBody>
@@ -49952,7 +50466,7 @@
                 </a:solidFill>
                 <a:latin typeface="Segoe UI"/>
               </a:rPr>
-              <a:t>Auth, QR login, conversation events, AI consent.</a:t>
+              <a:t>Auth · QR · events · AI</a:t>
             </a:r>
           </a:p>
         </p:txBody>
@@ -50237,7 +50751,7 @@
                 </a:solidFill>
                 <a:latin typeface="Segoe UI"/>
               </a:rPr>
-              <a:t>Thông báo đẩy cho chat, kết bạn, cuộc gọi, story.</a:t>
+              <a:t>Thông báo đẩy cho mobile</a:t>
             </a:r>
           </a:p>
         </p:txBody>
@@ -52266,7 +52780,23 @@
                 </a:solidFill>
                 <a:latin typeface="Segoe UI"/>
               </a:rPr>
-              <a:t>Nghiên cứu &amp; vận dụng các nền tảng điện toán đám mây hiện đại để xây hệ thống mở rộng, bảo mật, tối ưu tài nguyên (Cloud-Based Architecture).</a:t>
+              <a:t>Vận dụng nền tảng đám mây</a:t>
+            </a:r>
+          </a:p>
+          <a:p>
+            <a:pPr algn="l">
+              <a:lnSpc>
+                <a:spcPct val="105000"/>
+              </a:lnSpc>
+            </a:pPr>
+            <a:r>
+              <a:rPr sz="1200" b="0" i="0">
+                <a:solidFill>
+                  <a:srgbClr val="23426B"/>
+                </a:solidFill>
+                <a:latin typeface="Segoe UI"/>
+              </a:rPr>
+              <a:t>Mở rộng · Bảo mật · Tối ưu tài nguyên</a:t>
             </a:r>
           </a:p>
         </p:txBody>
@@ -52551,7 +53081,23 @@
                 </a:solidFill>
                 <a:latin typeface="Segoe UI"/>
               </a:rPr>
-              <a:t>Triển khai Polyglot Persistence (Hybrid Database), tối ưu truy vấn (Compound Index), nhiều chiến lược cache; chung 1 backend cho Web &amp; Mobile.</a:t>
+              <a:t>Hybrid Database · Compound Index</a:t>
+            </a:r>
+          </a:p>
+          <a:p>
+            <a:pPr algn="l">
+              <a:lnSpc>
+                <a:spcPct val="105000"/>
+              </a:lnSpc>
+            </a:pPr>
+            <a:r>
+              <a:rPr sz="1200" b="0" i="0">
+                <a:solidFill>
+                  <a:srgbClr val="23426B"/>
+                </a:solidFill>
+                <a:latin typeface="Segoe UI"/>
+              </a:rPr>
+              <a:t>Cache đa tầng · 1 backend dùng chung</a:t>
             </a:r>
           </a:p>
         </p:txBody>
@@ -52836,7 +53382,23 @@
                 </a:solidFill>
                 <a:latin typeface="Segoe UI"/>
               </a:rPr>
-              <a:t>Giao tiếp thời gian thực độ trễ thấp cho chat, notification, cuộc gọi; tối ưu lưu trữ - truy xuất - đồng bộ dữ liệu.</a:t>
+              <a:t>Độ trễ thấp · đồng bộ dữ liệu</a:t>
+            </a:r>
+          </a:p>
+          <a:p>
+            <a:pPr algn="l">
+              <a:lnSpc>
+                <a:spcPct val="105000"/>
+              </a:lnSpc>
+            </a:pPr>
+            <a:r>
+              <a:rPr sz="1200" b="0" i="0">
+                <a:solidFill>
+                  <a:srgbClr val="23426B"/>
+                </a:solidFill>
+                <a:latin typeface="Segoe UI"/>
+              </a:rPr>
+              <a:t>Chat · Notification · Cuộc gọi</a:t>
             </a:r>
           </a:p>
         </p:txBody>
@@ -53121,7 +53683,23 @@
                 </a:solidFill>
                 <a:latin typeface="Segoe UI"/>
               </a:rPr>
-              <a:t>Giao diện hiện đại, trực quan, hoàn toàn tiếng Việt; hỗ trợ Dark Mode trên cả Web và Mobile.</a:t>
+              <a:t>Giao diện tiếng Việt · trực quan</a:t>
+            </a:r>
+          </a:p>
+          <a:p>
+            <a:pPr algn="l">
+              <a:lnSpc>
+                <a:spcPct val="105000"/>
+              </a:lnSpc>
+            </a:pPr>
+            <a:r>
+              <a:rPr sz="1200" b="0" i="0">
+                <a:solidFill>
+                  <a:srgbClr val="23426B"/>
+                </a:solidFill>
+                <a:latin typeface="Segoe UI"/>
+              </a:rPr>
+              <a:t>Dark Mode (Web &amp; Mobile)</a:t>
             </a:r>
           </a:p>
         </p:txBody>
@@ -53626,13 +54204,13 @@
               </a:lnSpc>
             </a:pPr>
             <a:r>
-              <a:rPr sz="1300" b="0" i="0">
+              <a:rPr sz="1400" b="1" i="0">
                 <a:solidFill>
                   <a:srgbClr val="23426B"/>
                 </a:solidFill>
                 <a:latin typeface="Segoe UI"/>
               </a:rPr>
-              <a:t>Thiết kế Cloud-Based Architecture — tận dụng dịch vụ chuyên biệt từ nhiều nhà cung cấp để tối ưu từng thành phần.</a:t>
+              <a:t>Cloud-Based Architecture  ·  mỗi dịch vụ tối ưu một thành phần</a:t>
             </a:r>
           </a:p>
         </p:txBody>
@@ -53857,7 +54435,7 @@
                 </a:solidFill>
                 <a:latin typeface="Segoe UI"/>
               </a:rPr>
-              <a:t>Quản lý danh tính tập trung: đăng ký, OTP qua SĐT, đăng nhập, phiên &amp; cấp JWT.</a:t>
+              <a:t>Đăng ký · OTP · Đăng nhập · JWT</a:t>
             </a:r>
           </a:p>
         </p:txBody>
@@ -54082,7 +54660,7 @@
                 </a:solidFill>
                 <a:latin typeface="Segoe UI"/>
               </a:rPr>
-              <a:t>Lưu media (ảnh, video, story, reels, avatar) qua Pre-signed URL — client upload trực tiếp.</a:t>
+              <a:t>Lưu media · Pre-signed URL</a:t>
             </a:r>
           </a:p>
         </p:txBody>
@@ -54307,7 +54885,7 @@
                 </a:solidFill>
                 <a:latin typeface="Segoe UI"/>
               </a:rPr>
-              <a:t>Máy chủ ảo (IaaS) chạy backend Spring Boot — chủ động cấu hình môi trường &amp; tài nguyên.</a:t>
+              <a:t>Máy chủ ảo (IaaS) · Spring Boot</a:t>
             </a:r>
           </a:p>
         </p:txBody>
@@ -54532,7 +55110,7 @@
                 </a:solidFill>
                 <a:latin typeface="Segoe UI"/>
               </a:rPr>
-              <a:t>Kho Docker Image tập trung — quản lý phiên bản, nền tảng cho DevOps / CI-CD.</a:t>
+              <a:t>Kho Docker Image · CI/CD</a:t>
             </a:r>
           </a:p>
         </p:txBody>
@@ -54757,7 +55335,7 @@
                 </a:solidFill>
                 <a:latin typeface="Segoe UI"/>
               </a:rPr>
-              <a:t>MariaDB dạng DBaaS — dữ liệu quan hệ (user, bạn bè, hội thoại, page).</a:t>
+              <a:t>MariaDB (DBaaS) · dữ liệu quan hệ</a:t>
             </a:r>
           </a:p>
         </p:txBody>
@@ -54982,7 +55560,7 @@
                 </a:solidFill>
                 <a:latin typeface="Segoe UI"/>
               </a:rPr>
-              <a:t>MongoDB trên cloud — bài viết, tin nhắn, bình luận, story, thông báo.</a:t>
+              <a:t>MongoDB cloud · nội dung MXH</a:t>
             </a:r>
           </a:p>
         </p:txBody>
@@ -55207,7 +55785,7 @@
                 </a:solidFill>
                 <a:latin typeface="Segoe UI"/>
               </a:rPr>
-              <a:t>Deploy &amp; CDN toàn cầu cho React — auto build từ GitHub, giảm độ trễ tải UI.</a:t>
+              <a:t>Deploy + CDN · auto build</a:t>
             </a:r>
           </a:p>
         </p:txBody>
@@ -55432,7 +56010,7 @@
                 </a:solidFill>
                 <a:latin typeface="Segoe UI"/>
               </a:rPr>
-              <a:t>AI Gateway chuẩn OpenAPI — kết nối GPT, Claude, Gemini, DeepSeek, Mistral.</a:t>
+              <a:t>AI Gateway · đa mô hình</a:t>
             </a:r>
           </a:p>
         </p:txBody>
@@ -55918,7 +56496,7 @@
         <p:spPr>
           <a:xfrm>
             <a:off x="777240" y="1645920"/>
-            <a:ext cx="10607040" cy="548640"/>
+            <a:ext cx="10607040" cy="457200"/>
           </a:xfrm>
           <a:prstGeom prst="rect">
             <a:avLst/>
@@ -55937,13 +56515,13 @@
               </a:lnSpc>
             </a:pPr>
             <a:r>
-              <a:rPr sz="1400" b="0" i="0">
+              <a:rPr sz="1400" b="1" i="0">
                 <a:solidFill>
                   <a:srgbClr val="23426B"/>
                 </a:solidFill>
                 <a:latin typeface="Segoe UI"/>
               </a:rPr>
-              <a:t>Việc kết hợp nhiều nền tảng giúp nhóm tiếp cận thực tế nhiều mô hình dịch vụ điện toán đám mây khác nhau:</a:t>
+              <a:t>6 mô hình dịch vụ cloud trong cùng một hệ thống</a:t>
             </a:r>
           </a:p>
         </p:txBody>
@@ -56168,7 +56746,7 @@
                 </a:solidFill>
                 <a:latin typeface="Segoe UI"/>
               </a:rPr>
-              <a:t>AWS EC2 — máy chủ ảo chạy backend</a:t>
+              <a:t>AWS EC2 · máy chủ ảo</a:t>
             </a:r>
           </a:p>
         </p:txBody>
@@ -56393,7 +56971,7 @@
                 </a:solidFill>
                 <a:latin typeface="Segoe UI"/>
               </a:rPr>
-              <a:t>Vercel — build &amp; deploy frontend tự động</a:t>
+              <a:t>Vercel · deploy frontend</a:t>
             </a:r>
           </a:p>
         </p:txBody>
@@ -56618,7 +57196,7 @@
                 </a:solidFill>
                 <a:latin typeface="Segoe UI"/>
               </a:rPr>
-              <a:t>TiBi Cloud (MariaDB) · MongoDB Atlas</a:t>
+              <a:t>TiBi Cloud · MongoDB Atlas</a:t>
             </a:r>
           </a:p>
         </p:txBody>
@@ -56804,7 +57382,7 @@
                 </a:solidFill>
                 <a:latin typeface="Segoe UI Semibold"/>
               </a:rPr>
-              <a:t>Container Registry Service</a:t>
+              <a:t>Container Registry</a:t>
             </a:r>
           </a:p>
         </p:txBody>
@@ -56843,7 +57421,7 @@
                 </a:solidFill>
                 <a:latin typeface="Segoe UI"/>
               </a:rPr>
-              <a:t>AWS ECR — kho Docker Image tập trung</a:t>
+              <a:t>AWS ECR · Docker Image</a:t>
             </a:r>
           </a:p>
         </p:txBody>
@@ -57068,7 +57646,7 @@
                 </a:solidFill>
                 <a:latin typeface="Segoe UI"/>
               </a:rPr>
-              <a:t>OpenRouter — AI Gateway đa mô hình</a:t>
+              <a:t>OpenRouter · AI Gateway</a:t>
             </a:r>
           </a:p>
         </p:txBody>
@@ -57254,7 +57832,7 @@
                 </a:solidFill>
                 <a:latin typeface="Segoe UI Semibold"/>
               </a:rPr>
-              <a:t>Identity &amp; Auth Service</a:t>
+              <a:t>Identity &amp; Auth</a:t>
             </a:r>
           </a:p>
         </p:txBody>
@@ -57293,7 +57871,7 @@
                 </a:solidFill>
                 <a:latin typeface="Segoe UI"/>
               </a:rPr>
-              <a:t>AWS Cognito — xác thực &amp; quản lý người dùng</a:t>
+              <a:t>AWS Cognito · xác thực</a:t>
             </a:r>
           </a:p>
         </p:txBody>
@@ -62135,7 +62713,7 @@
                 </a:solidFill>
                 <a:latin typeface="Segoe UI"/>
               </a:rPr>
-              <a:t>Java 21, Spring Boot 3.5.6</a:t>
+              <a:t>Java 21 · Spring Boot 3.5</a:t>
             </a:r>
           </a:p>
           <a:p>
@@ -62151,7 +62729,7 @@
                 </a:solidFill>
                 <a:latin typeface="Segoe UI"/>
               </a:rPr>
-              <a:t>Spring Web (REST), Spring WebFlux (WebClient reactive cho AI), Spring WebSocket (STOMP).</a:t>
+              <a:t>Web · WebFlux · WebSocket</a:t>
             </a:r>
           </a:p>
         </p:txBody>
@@ -62436,7 +63014,7 @@
                 </a:solidFill>
                 <a:latin typeface="Segoe UI"/>
               </a:rPr>
-              <a:t>Spring Data JPA → MariaDB (định danh, hội thoại).</a:t>
+              <a:t>JPA → MariaDB</a:t>
             </a:r>
           </a:p>
           <a:p>
@@ -62452,7 +63030,7 @@
                 </a:solidFill>
                 <a:latin typeface="Segoe UI"/>
               </a:rPr>
-              <a:t>Spring Data MongoDB → nội dung MXH (post, comment, message...).</a:t>
+              <a:t>MongoDB → nội dung MXH</a:t>
             </a:r>
           </a:p>
         </p:txBody>
@@ -62737,7 +63315,23 @@
                 </a:solidFill>
                 <a:latin typeface="Segoe UI"/>
               </a:rPr>
-              <a:t>Spring Security stateless, xác thực JWT do Cognito phát hành, secure cookies &amp; luồng refresh token.</a:t>
+              <a:t>Spring Security stateless</a:t>
+            </a:r>
+          </a:p>
+          <a:p>
+            <a:pPr algn="l">
+              <a:lnSpc>
+                <a:spcPct val="105000"/>
+              </a:lnSpc>
+            </a:pPr>
+            <a:r>
+              <a:rPr sz="1200" b="0" i="0">
+                <a:solidFill>
+                  <a:srgbClr val="23426B"/>
+                </a:solidFill>
+                <a:latin typeface="Segoe UI"/>
+              </a:rPr>
+              <a:t>JWT · cookies · refresh</a:t>
             </a:r>
           </a:p>
         </p:txBody>
@@ -63022,7 +63616,23 @@
                 </a:solidFill>
                 <a:latin typeface="Segoe UI"/>
               </a:rPr>
-              <a:t>STOMP broker, tầng Event publish sự kiện hội thoại/tin nhắn/thành viên qua Redis Pub/Sub.</a:t>
+              <a:t>STOMP broker · Event layer</a:t>
+            </a:r>
+          </a:p>
+          <a:p>
+            <a:pPr algn="l">
+              <a:lnSpc>
+                <a:spcPct val="105000"/>
+              </a:lnSpc>
+            </a:pPr>
+            <a:r>
+              <a:rPr sz="1200" b="0" i="0">
+                <a:solidFill>
+                  <a:srgbClr val="23426B"/>
+                </a:solidFill>
+                <a:latin typeface="Segoe UI"/>
+              </a:rPr>
+              <a:t>Redis Pub/Sub</a:t>
             </a:r>
           </a:p>
         </p:txBody>
